--- a/Slide_Bao_Cao_Cuoi_Ky_HUIT.pptx
+++ b/Slide_Bao_Cao_Cuoi_Ky_HUIT.pptx
@@ -20,6 +20,7 @@
     <p:sldId id="268" r:id="rId19"/>
     <p:sldId id="269" r:id="rId20"/>
     <p:sldId id="270" r:id="rId21"/>
+    <p:sldId id="271" r:id="rId22"/>
   </p:sldIdLst>
   <p:sldSz cx="12191695" cy="6858000" type="screen4x3"/>
   <p:notesSz cx="6858000" cy="9144000"/>
@@ -3156,7 +3157,7 @@
               </a:defRPr>
             </a:pPr>
             <a:r>
-              <a:t>PHẦN 1: ĐẶT VẤN ĐỀ (1 - 2 PHÚT)  |  Slide 1/15</a:t>
+              <a:t>PHẦN 1: ĐẶT VẤN ĐỀ (1 - 2 PHÚT)  |  Slide 1/16</a:t>
             </a:r>
           </a:p>
         </p:txBody>
@@ -4079,7 +4080,7 @@
               </a:defRPr>
             </a:pPr>
             <a:r>
-              <a:t>PHẦN 4: XỬ LÝ DỮ LIỆU - ETL &amp; MLLIB (3 - 4 PHÚT)  |  Slide 10/15</a:t>
+              <a:t>PHẦN 4: XỬ LÝ DỮ LIỆU - ETL (3 - 4 PHÚT)  |  Slide 10/16</a:t>
             </a:r>
           </a:p>
         </p:txBody>
@@ -4114,21 +4115,139 @@
               </a:defRPr>
             </a:pPr>
             <a:r>
-              <a:t>4.3. HUẤN LUYỆN MÔ HÌNH HỌC MÁY PHÂN TÁN SPARK MLLIB (ALS)</a:t>
-            </a:r>
-          </a:p>
-        </p:txBody>
-      </p:sp>
-      <p:sp>
-        <p:nvSpPr>
-          <p:cNvPr id="5" name="Rounded Rectangle 4"/>
+              <a:t>4.2. THỰC NGHIỆM BENCHMARK: CSV THÔ VS. PARQUET TỐI ƯU</a:t>
+            </a:r>
+          </a:p>
+        </p:txBody>
+      </p:sp>
+      <p:pic>
+        <p:nvPicPr>
+          <p:cNvPr id="5" name="Picture 4" descr="7_Benchmark_Storage_Comparison.png"/>
+          <p:cNvPicPr>
+            <a:picLocks noChangeAspect="1"/>
+          </p:cNvPicPr>
+          <p:nvPr/>
+        </p:nvPicPr>
+        <p:blipFill>
+          <a:blip r:embed="rId3"/>
+          <a:stretch>
+            <a:fillRect/>
+          </a:stretch>
+        </p:blipFill>
+        <p:spPr>
+          <a:xfrm>
+            <a:off x="548640" y="1463040"/>
+            <a:ext cx="5303520" cy="3017520"/>
+          </a:xfrm>
+          <a:prstGeom prst="rect">
+            <a:avLst/>
+          </a:prstGeom>
+        </p:spPr>
+      </p:pic>
+      <p:sp>
+        <p:nvSpPr>
+          <p:cNvPr id="6" name="TextBox 5"/>
+          <p:cNvSpPr txBox="1"/>
+          <p:nvPr/>
+        </p:nvSpPr>
+        <p:spPr>
+          <a:xfrm>
+            <a:off x="548640" y="4526280"/>
+            <a:ext cx="5303520" cy="274320"/>
+          </a:xfrm>
+          <a:prstGeom prst="rect">
+            <a:avLst/>
+          </a:prstGeom>
+          <a:noFill/>
+        </p:spPr>
+        <p:txBody>
+          <a:bodyPr wrap="none">
+            <a:spAutoFit/>
+          </a:bodyPr>
+          <a:lstStyle/>
+          <a:p>
+            <a:pPr algn="ctr">
+              <a:defRPr sz="1000" i="1">
+                <a:solidFill>
+                  <a:srgbClr val="6C757D"/>
+                </a:solidFill>
+              </a:defRPr>
+            </a:pPr>
+            <a:r>
+              <a:t>Thực nghiệm 1: Giảm 94.9% dung lượng (1,400 MB xuống 72 MB)</a:t>
+            </a:r>
+          </a:p>
+        </p:txBody>
+      </p:sp>
+      <p:pic>
+        <p:nvPicPr>
+          <p:cNvPr id="7" name="Picture 6" descr="8_Benchmark_Read_Speed.png"/>
+          <p:cNvPicPr>
+            <a:picLocks noChangeAspect="1"/>
+          </p:cNvPicPr>
+          <p:nvPr/>
+        </p:nvPicPr>
+        <p:blipFill>
+          <a:blip r:embed="rId4"/>
+          <a:stretch>
+            <a:fillRect/>
+          </a:stretch>
+        </p:blipFill>
+        <p:spPr>
+          <a:xfrm>
+            <a:off x="6217920" y="1463040"/>
+            <a:ext cx="5394960" cy="3017520"/>
+          </a:xfrm>
+          <a:prstGeom prst="rect">
+            <a:avLst/>
+          </a:prstGeom>
+        </p:spPr>
+      </p:pic>
+      <p:sp>
+        <p:nvSpPr>
+          <p:cNvPr id="8" name="TextBox 7"/>
+          <p:cNvSpPr txBox="1"/>
+          <p:nvPr/>
+        </p:nvSpPr>
+        <p:spPr>
+          <a:xfrm>
+            <a:off x="6217920" y="4526280"/>
+            <a:ext cx="5394960" cy="274320"/>
+          </a:xfrm>
+          <a:prstGeom prst="rect">
+            <a:avLst/>
+          </a:prstGeom>
+          <a:noFill/>
+        </p:spPr>
+        <p:txBody>
+          <a:bodyPr wrap="none">
+            <a:spAutoFit/>
+          </a:bodyPr>
+          <a:lstStyle/>
+          <a:p>
+            <a:pPr algn="ctr">
+              <a:defRPr sz="1000" i="1">
+                <a:solidFill>
+                  <a:srgbClr val="6C757D"/>
+                </a:solidFill>
+              </a:defRPr>
+            </a:pPr>
+            <a:r>
+              <a:t>Thực nghiệm 2: Tăng tốc đọc gấp ~13.2 lần (18.5s xuống 1.4s)</a:t>
+            </a:r>
+          </a:p>
+        </p:txBody>
+      </p:sp>
+      <p:sp>
+        <p:nvSpPr>
+          <p:cNvPr id="9" name="Rounded Rectangle 8"/>
           <p:cNvSpPr/>
           <p:nvPr/>
         </p:nvSpPr>
         <p:spPr>
           <a:xfrm>
-            <a:off x="548640" y="1463040"/>
-            <a:ext cx="11064240" cy="1371600"/>
+            <a:off x="548640" y="4709160"/>
+            <a:ext cx="11064240" cy="1691640"/>
           </a:xfrm>
           <a:prstGeom prst="roundRect">
             <a:avLst/>
@@ -4166,20 +4285,20 @@
       </p:sp>
       <p:sp>
         <p:nvSpPr>
-          <p:cNvPr id="6" name="Rectangle 5"/>
+          <p:cNvPr id="10" name="Rectangle 9"/>
           <p:cNvSpPr/>
           <p:nvPr/>
         </p:nvSpPr>
         <p:spPr>
           <a:xfrm>
-            <a:off x="548640" y="1463040"/>
+            <a:off x="548640" y="4709160"/>
             <a:ext cx="11064240" cy="64008"/>
           </a:xfrm>
           <a:prstGeom prst="rect">
             <a:avLst/>
           </a:prstGeom>
           <a:solidFill>
-            <a:srgbClr val="0D3B66"/>
+            <a:srgbClr val="2E7D32"/>
           </a:solidFill>
           <a:ln>
             <a:noFill/>
@@ -4209,14 +4328,14 @@
       </p:sp>
       <p:sp>
         <p:nvSpPr>
-          <p:cNvPr id="7" name="TextBox 6"/>
+          <p:cNvPr id="11" name="TextBox 10"/>
           <p:cNvSpPr txBox="1"/>
           <p:nvPr/>
         </p:nvSpPr>
         <p:spPr>
           <a:xfrm>
-            <a:off x="685800" y="1572768"/>
-            <a:ext cx="10789919" cy="1207008"/>
+            <a:off x="685800" y="4818888"/>
+            <a:ext cx="10789919" cy="1527048"/>
           </a:xfrm>
           <a:prstGeom prst="rect">
             <a:avLst/>
@@ -4235,12 +4354,12 @@
               </a:spcAft>
               <a:defRPr sz="1300" b="1">
                 <a:solidFill>
-                  <a:srgbClr val="0D3B66"/>
-                </a:solidFill>
-              </a:defRPr>
-            </a:pPr>
-            <a:r>
-              <a:t>CƠ CHẾ PHÂN RÃ MA TRẬN (MATRIX FACTORIZATION) &amp; IMPLICIT ALS (02_TRAIN_ALS.PY)</a:t>
+                  <a:srgbClr val="2E7D32"/>
+                </a:solidFill>
+              </a:defRPr>
+            </a:pPr>
+            <a:r>
+              <a:t>KẾT LUẬN TỪ KỊCH BẢN ĐO KIỂM (03_BENCHMARK.PY)</a:t>
             </a:r>
           </a:p>
           <a:p>
@@ -4255,7 +4374,7 @@
               </a:defRPr>
             </a:pPr>
             <a:r>
-              <a:t>• Xấp xỉ ma trận thưa R ≈ U x V^T (k = 10 chiều ẩn); c_ui = 1 + α * r_ui; maxIter = 10, regParam = 0.01, 80% Train / 20% Test.</a:t>
+              <a:t>• Tiết kiệm băng thông &amp; đĩa HDFS: File Parquet nén Snappy chỉ chiếm 72 MB so với 1,400 MB của CSV thô (giảm 94.9%).</a:t>
             </a:r>
           </a:p>
           <a:p>
@@ -4270,125 +4389,7 @@
               </a:defRPr>
             </a:pPr>
             <a:r>
-              <a:t>• Cơ chế luân phiên (Alternating): Cố định V tìm U song song trên Spark Workers, sau đó cố định U tìm V.</a:t>
-            </a:r>
-          </a:p>
-        </p:txBody>
-      </p:sp>
-      <p:pic>
-        <p:nvPicPr>
-          <p:cNvPr id="8" name="Picture 7" descr="5_Model_Convergence.png"/>
-          <p:cNvPicPr>
-            <a:picLocks noChangeAspect="1"/>
-          </p:cNvPicPr>
-          <p:nvPr/>
-        </p:nvPicPr>
-        <p:blipFill>
-          <a:blip r:embed="rId3"/>
-          <a:stretch>
-            <a:fillRect/>
-          </a:stretch>
-        </p:blipFill>
-        <p:spPr>
-          <a:xfrm>
-            <a:off x="548640" y="2971800"/>
-            <a:ext cx="5303520" cy="3383280"/>
-          </a:xfrm>
-          <a:prstGeom prst="rect">
-            <a:avLst/>
-          </a:prstGeom>
-        </p:spPr>
-      </p:pic>
-      <p:sp>
-        <p:nvSpPr>
-          <p:cNvPr id="9" name="TextBox 8"/>
-          <p:cNvSpPr txBox="1"/>
-          <p:nvPr/>
-        </p:nvSpPr>
-        <p:spPr>
-          <a:xfrm>
-            <a:off x="548640" y="6400800"/>
-            <a:ext cx="5303520" cy="274320"/>
-          </a:xfrm>
-          <a:prstGeom prst="rect">
-            <a:avLst/>
-          </a:prstGeom>
-          <a:noFill/>
-        </p:spPr>
-        <p:txBody>
-          <a:bodyPr wrap="none">
-            <a:spAutoFit/>
-          </a:bodyPr>
-          <a:lstStyle/>
-          <a:p>
-            <a:pPr algn="ctr">
-              <a:defRPr sz="1000" i="1">
-                <a:solidFill>
-                  <a:srgbClr val="6C757D"/>
-                </a:solidFill>
-              </a:defRPr>
-            </a:pPr>
-            <a:r>
-              <a:t>Đường cong hội tụ RMSE qua 10 vòng lặp (Final RMSE ~ 0.021)</a:t>
-            </a:r>
-          </a:p>
-        </p:txBody>
-      </p:sp>
-      <p:pic>
-        <p:nvPicPr>
-          <p:cNvPr id="10" name="Picture 9" descr="6_Model_Comparison.png"/>
-          <p:cNvPicPr>
-            <a:picLocks noChangeAspect="1"/>
-          </p:cNvPicPr>
-          <p:nvPr/>
-        </p:nvPicPr>
-        <p:blipFill>
-          <a:blip r:embed="rId4"/>
-          <a:stretch>
-            <a:fillRect/>
-          </a:stretch>
-        </p:blipFill>
-        <p:spPr>
-          <a:xfrm>
-            <a:off x="6217920" y="2971800"/>
-            <a:ext cx="5394960" cy="3383280"/>
-          </a:xfrm>
-          <a:prstGeom prst="rect">
-            <a:avLst/>
-          </a:prstGeom>
-        </p:spPr>
-      </p:pic>
-      <p:sp>
-        <p:nvSpPr>
-          <p:cNvPr id="11" name="TextBox 10"/>
-          <p:cNvSpPr txBox="1"/>
-          <p:nvPr/>
-        </p:nvSpPr>
-        <p:spPr>
-          <a:xfrm>
-            <a:off x="6217920" y="6400800"/>
-            <a:ext cx="5394960" cy="274320"/>
-          </a:xfrm>
-          <a:prstGeom prst="rect">
-            <a:avLst/>
-          </a:prstGeom>
-          <a:noFill/>
-        </p:spPr>
-        <p:txBody>
-          <a:bodyPr wrap="none">
-            <a:spAutoFit/>
-          </a:bodyPr>
-          <a:lstStyle/>
-          <a:p>
-            <a:pPr algn="ctr">
-              <a:defRPr sz="1000" i="1">
-                <a:solidFill>
-                  <a:srgbClr val="6C757D"/>
-                </a:solidFill>
-              </a:defRPr>
-            </a:pPr>
-            <a:r>
-              <a:t>So sánh: Spark ALS (0.021) cải thiện độ chính xác +75.3% so với Baseline (0.085)</a:t>
+              <a:t>• Tăng tốc In-Memory: Nhờ tích hợp sẵn Metadata Schema và cơ chế Column Pruning, thời gian nạp vào Spark giảm từ 18.5s xuống 1.4s.</a:t>
             </a:r>
           </a:p>
         </p:txBody>
@@ -4465,7 +4466,7 @@
               </a:defRPr>
             </a:pPr>
             <a:r>
-              <a:t>PHẦN 4: XỬ LÝ DỮ LIỆU - ETL (3 - 4 PHÚT)  |  Slide 11/15</a:t>
+              <a:t>PHẦN 4: XỬ LÝ DỮ LIỆU - ETL &amp; MLLIB (3 - 4 PHÚT)  |  Slide 11/16</a:t>
             </a:r>
           </a:p>
         </p:txBody>
@@ -4500,7 +4501,7 @@
               </a:defRPr>
             </a:pPr>
             <a:r>
-              <a:t>4.4. ĐIỂM NHẤN KỸ THUẬT: KHÓ KHĂN TRÀN RAM &amp; GIẢI PHÁP</a:t>
+              <a:t>4.3. HUẤN LUYỆN MÔ HÌNH HỌC MÁY PHÂN TÁN SPARK MLLIB (ALS)</a:t>
             </a:r>
           </a:p>
         </p:txBody>
@@ -4514,7 +4515,7 @@
         <p:spPr>
           <a:xfrm>
             <a:off x="548640" y="1463040"/>
-            <a:ext cx="5394960" cy="2377440"/>
+            <a:ext cx="11064240" cy="1371600"/>
           </a:xfrm>
           <a:prstGeom prst="roundRect">
             <a:avLst/>
@@ -4559,13 +4560,13 @@
         <p:spPr>
           <a:xfrm>
             <a:off x="548640" y="1463040"/>
-            <a:ext cx="5394960" cy="64008"/>
+            <a:ext cx="11064240" cy="64008"/>
           </a:xfrm>
           <a:prstGeom prst="rect">
             <a:avLst/>
           </a:prstGeom>
           <a:solidFill>
-            <a:srgbClr val="D32F2F"/>
+            <a:srgbClr val="0D3B66"/>
           </a:solidFill>
           <a:ln>
             <a:noFill/>
@@ -4602,7 +4603,7 @@
         <p:spPr>
           <a:xfrm>
             <a:off x="685800" y="1572768"/>
-            <a:ext cx="5120640" cy="2212848"/>
+            <a:ext cx="10789919" cy="1207008"/>
           </a:xfrm>
           <a:prstGeom prst="rect">
             <a:avLst/>
@@ -4621,12 +4622,12 @@
               </a:spcAft>
               <a:defRPr sz="1300" b="1">
                 <a:solidFill>
-                  <a:srgbClr val="D32F2F"/>
-                </a:solidFill>
-              </a:defRPr>
-            </a:pPr>
-            <a:r>
-              <a:t>1. TRÀN RAM KHI SHUFFLE / TRAIN ALS</a:t>
+                  <a:srgbClr val="0D3B66"/>
+                </a:solidFill>
+              </a:defRPr>
+            </a:pPr>
+            <a:r>
+              <a:t>CƠ CHẾ PHÂN RÃ MA TRẬN (MATRIX FACTORIZATION) &amp; IMPLICIT ALS (02_TRAIN_ALS.PY)</a:t>
             </a:r>
           </a:p>
           <a:p>
@@ -4641,7 +4642,7 @@
               </a:defRPr>
             </a:pPr>
             <a:r>
-              <a:t>• Khó khăn: Gom nhóm 2.75M dòng và giải ALS gây áp lực JVM.</a:t>
+              <a:t>• Xấp xỉ ma trận thưa R ≈ U x V^T (k = 10 chiều ẩn); c_ui = 1 + α * r_ui; maxIter = 10, regParam = 0.01, 80% Train / 20% Test.</a:t>
             </a:r>
           </a:p>
           <a:p>
@@ -4656,109 +4657,45 @@
               </a:defRPr>
             </a:pPr>
             <a:r>
-              <a:t>• Giải pháp: Cấp --driver-memory 4g; đọc Parquet (72MB) thay vì CSV.</a:t>
-            </a:r>
-          </a:p>
-        </p:txBody>
-      </p:sp>
-      <p:sp>
-        <p:nvSpPr>
-          <p:cNvPr id="8" name="Rounded Rectangle 7"/>
-          <p:cNvSpPr/>
-          <p:nvPr/>
-        </p:nvSpPr>
-        <p:spPr>
-          <a:xfrm>
-            <a:off x="6217920" y="1463040"/>
-            <a:ext cx="5394960" cy="2377440"/>
-          </a:xfrm>
-          <a:prstGeom prst="roundRect">
-            <a:avLst/>
-          </a:prstGeom>
-          <a:solidFill>
-            <a:srgbClr val="F5F8FC"/>
-          </a:solidFill>
-          <a:ln w="12700">
-            <a:solidFill>
-              <a:srgbClr val="BBDEFB"/>
-            </a:solidFill>
-          </a:ln>
-        </p:spPr>
-        <p:style>
-          <a:lnRef idx="1">
-            <a:schemeClr val="accent1"/>
-          </a:lnRef>
-          <a:fillRef idx="3">
-            <a:schemeClr val="accent1"/>
-          </a:fillRef>
-          <a:effectRef idx="2">
-            <a:schemeClr val="accent1"/>
-          </a:effectRef>
-          <a:fontRef idx="minor">
-            <a:schemeClr val="lt1"/>
-          </a:fontRef>
-        </p:style>
-        <p:txBody>
-          <a:bodyPr rtlCol="0" anchor="ctr"/>
-          <a:lstStyle/>
-          <a:p>
-            <a:pPr algn="ctr"/>
-          </a:p>
-        </p:txBody>
-      </p:sp>
-      <p:sp>
-        <p:nvSpPr>
-          <p:cNvPr id="9" name="Rectangle 8"/>
-          <p:cNvSpPr/>
-          <p:nvPr/>
-        </p:nvSpPr>
-        <p:spPr>
-          <a:xfrm>
-            <a:off x="6217920" y="1463040"/>
-            <a:ext cx="5394960" cy="64008"/>
-          </a:xfrm>
-          <a:prstGeom prst="rect">
-            <a:avLst/>
-          </a:prstGeom>
-          <a:solidFill>
-            <a:srgbClr val="1565C0"/>
-          </a:solidFill>
-          <a:ln>
-            <a:noFill/>
-          </a:ln>
-        </p:spPr>
-        <p:style>
-          <a:lnRef idx="1">
-            <a:schemeClr val="accent1"/>
-          </a:lnRef>
-          <a:fillRef idx="3">
-            <a:schemeClr val="accent1"/>
-          </a:fillRef>
-          <a:effectRef idx="2">
-            <a:schemeClr val="accent1"/>
-          </a:effectRef>
-          <a:fontRef idx="minor">
-            <a:schemeClr val="lt1"/>
-          </a:fontRef>
-        </p:style>
-        <p:txBody>
-          <a:bodyPr rtlCol="0" anchor="ctr"/>
-          <a:lstStyle/>
-          <a:p>
-            <a:pPr algn="ctr"/>
-          </a:p>
-        </p:txBody>
-      </p:sp>
-      <p:sp>
-        <p:nvSpPr>
-          <p:cNvPr id="10" name="TextBox 9"/>
+              <a:t>• Cơ chế luân phiên (Alternating): Cố định V tìm U song song trên Spark Workers, sau đó cố định U tìm V.</a:t>
+            </a:r>
+          </a:p>
+        </p:txBody>
+      </p:sp>
+      <p:pic>
+        <p:nvPicPr>
+          <p:cNvPr id="8" name="Picture 7" descr="5_Model_Convergence.png"/>
+          <p:cNvPicPr>
+            <a:picLocks noChangeAspect="1"/>
+          </p:cNvPicPr>
+          <p:nvPr/>
+        </p:nvPicPr>
+        <p:blipFill>
+          <a:blip r:embed="rId3"/>
+          <a:stretch>
+            <a:fillRect/>
+          </a:stretch>
+        </p:blipFill>
+        <p:spPr>
+          <a:xfrm>
+            <a:off x="548640" y="2971800"/>
+            <a:ext cx="5303520" cy="3383280"/>
+          </a:xfrm>
+          <a:prstGeom prst="rect">
+            <a:avLst/>
+          </a:prstGeom>
+        </p:spPr>
+      </p:pic>
+      <p:sp>
+        <p:nvSpPr>
+          <p:cNvPr id="9" name="TextBox 8"/>
           <p:cNvSpPr txBox="1"/>
           <p:nvPr/>
         </p:nvSpPr>
         <p:spPr>
           <a:xfrm>
-            <a:off x="6355080" y="1572768"/>
-            <a:ext cx="5120640" cy="2212848"/>
+            <a:off x="548640" y="6400800"/>
+            <a:ext cx="5303520" cy="274320"/>
           </a:xfrm>
           <a:prstGeom prst="rect">
             <a:avLst/>
@@ -4766,155 +4703,58 @@
           <a:noFill/>
         </p:spPr>
         <p:txBody>
-          <a:bodyPr wrap="square">
+          <a:bodyPr wrap="none">
             <a:spAutoFit/>
           </a:bodyPr>
           <a:lstStyle/>
           <a:p>
-            <a:pPr>
-              <a:spcAft>
-                <a:spcPts val="400"/>
-              </a:spcAft>
-              <a:defRPr sz="1300" b="1">
-                <a:solidFill>
-                  <a:srgbClr val="1565C0"/>
-                </a:solidFill>
-              </a:defRPr>
-            </a:pPr>
-            <a:r>
-              <a:t>2. TẠI SAO CHỌN ALS THAY VÌ SGD?</a:t>
-            </a:r>
-          </a:p>
-          <a:p>
-            <a:pPr>
-              <a:spcAft>
-                <a:spcPts val="250"/>
-              </a:spcAft>
-              <a:defRPr sz="1100">
-                <a:solidFill>
-                  <a:srgbClr val="212529"/>
-                </a:solidFill>
-              </a:defRPr>
-            </a:pPr>
-            <a:r>
-              <a:t>• Khó khăn: SGD đồng bộ trọng số qua mạng gây nghẽn cổ chai.</a:t>
-            </a:r>
-          </a:p>
-          <a:p>
-            <a:pPr>
-              <a:spcAft>
-                <a:spcPts val="250"/>
-              </a:spcAft>
-              <a:defRPr sz="1100">
-                <a:solidFill>
-                  <a:srgbClr val="212529"/>
-                </a:solidFill>
-              </a:defRPr>
-            </a:pPr>
-            <a:r>
-              <a:t>• Giải pháp: ALS cố định V giúp giải vector U độc lập, song song 100%.</a:t>
-            </a:r>
-          </a:p>
-        </p:txBody>
-      </p:sp>
-      <p:sp>
-        <p:nvSpPr>
-          <p:cNvPr id="11" name="Rounded Rectangle 10"/>
-          <p:cNvSpPr/>
-          <p:nvPr/>
-        </p:nvSpPr>
-        <p:spPr>
-          <a:xfrm>
-            <a:off x="548640" y="4023360"/>
-            <a:ext cx="5394960" cy="2377440"/>
-          </a:xfrm>
-          <a:prstGeom prst="roundRect">
-            <a:avLst/>
-          </a:prstGeom>
-          <a:solidFill>
-            <a:srgbClr val="F5F8FC"/>
-          </a:solidFill>
-          <a:ln w="12700">
-            <a:solidFill>
-              <a:srgbClr val="BBDEFB"/>
-            </a:solidFill>
-          </a:ln>
-        </p:spPr>
-        <p:style>
-          <a:lnRef idx="1">
-            <a:schemeClr val="accent1"/>
-          </a:lnRef>
-          <a:fillRef idx="3">
-            <a:schemeClr val="accent1"/>
-          </a:fillRef>
-          <a:effectRef idx="2">
-            <a:schemeClr val="accent1"/>
-          </a:effectRef>
-          <a:fontRef idx="minor">
-            <a:schemeClr val="lt1"/>
-          </a:fontRef>
-        </p:style>
-        <p:txBody>
-          <a:bodyPr rtlCol="0" anchor="ctr"/>
-          <a:lstStyle/>
-          <a:p>
-            <a:pPr algn="ctr"/>
-          </a:p>
-        </p:txBody>
-      </p:sp>
-      <p:sp>
-        <p:nvSpPr>
-          <p:cNvPr id="12" name="Rectangle 11"/>
-          <p:cNvSpPr/>
-          <p:nvPr/>
-        </p:nvSpPr>
-        <p:spPr>
-          <a:xfrm>
-            <a:off x="548640" y="4023360"/>
-            <a:ext cx="5394960" cy="64008"/>
-          </a:xfrm>
-          <a:prstGeom prst="rect">
-            <a:avLst/>
-          </a:prstGeom>
-          <a:solidFill>
-            <a:srgbClr val="E65100"/>
-          </a:solidFill>
-          <a:ln>
-            <a:noFill/>
-          </a:ln>
-        </p:spPr>
-        <p:style>
-          <a:lnRef idx="1">
-            <a:schemeClr val="accent1"/>
-          </a:lnRef>
-          <a:fillRef idx="3">
-            <a:schemeClr val="accent1"/>
-          </a:fillRef>
-          <a:effectRef idx="2">
-            <a:schemeClr val="accent1"/>
-          </a:effectRef>
-          <a:fontRef idx="minor">
-            <a:schemeClr val="lt1"/>
-          </a:fontRef>
-        </p:style>
-        <p:txBody>
-          <a:bodyPr rtlCol="0" anchor="ctr"/>
-          <a:lstStyle/>
-          <a:p>
-            <a:pPr algn="ctr"/>
-          </a:p>
-        </p:txBody>
-      </p:sp>
-      <p:sp>
-        <p:nvSpPr>
-          <p:cNvPr id="13" name="TextBox 12"/>
+            <a:pPr algn="ctr">
+              <a:defRPr sz="1000" i="1">
+                <a:solidFill>
+                  <a:srgbClr val="6C757D"/>
+                </a:solidFill>
+              </a:defRPr>
+            </a:pPr>
+            <a:r>
+              <a:t>Đường cong hội tụ RMSE qua 10 vòng lặp (Final RMSE ~ 0.021)</a:t>
+            </a:r>
+          </a:p>
+        </p:txBody>
+      </p:sp>
+      <p:pic>
+        <p:nvPicPr>
+          <p:cNvPr id="10" name="Picture 9" descr="6_Model_Comparison.png"/>
+          <p:cNvPicPr>
+            <a:picLocks noChangeAspect="1"/>
+          </p:cNvPicPr>
+          <p:nvPr/>
+        </p:nvPicPr>
+        <p:blipFill>
+          <a:blip r:embed="rId4"/>
+          <a:stretch>
+            <a:fillRect/>
+          </a:stretch>
+        </p:blipFill>
+        <p:spPr>
+          <a:xfrm>
+            <a:off x="6217920" y="2971800"/>
+            <a:ext cx="5394960" cy="3383280"/>
+          </a:xfrm>
+          <a:prstGeom prst="rect">
+            <a:avLst/>
+          </a:prstGeom>
+        </p:spPr>
+      </p:pic>
+      <p:sp>
+        <p:nvSpPr>
+          <p:cNvPr id="11" name="TextBox 10"/>
           <p:cNvSpPr txBox="1"/>
           <p:nvPr/>
         </p:nvSpPr>
         <p:spPr>
           <a:xfrm>
-            <a:off x="685800" y="4133088"/>
-            <a:ext cx="5120640" cy="2212848"/>
+            <a:off x="6217920" y="6400800"/>
+            <a:ext cx="5394960" cy="274320"/>
           </a:xfrm>
           <a:prstGeom prst="rect">
             <a:avLst/>
@@ -4922,209 +4762,20 @@
           <a:noFill/>
         </p:spPr>
         <p:txBody>
-          <a:bodyPr wrap="square">
+          <a:bodyPr wrap="none">
             <a:spAutoFit/>
           </a:bodyPr>
           <a:lstStyle/>
           <a:p>
-            <a:pPr>
-              <a:spcAft>
-                <a:spcPts val="400"/>
-              </a:spcAft>
-              <a:defRPr sz="1300" b="1">
-                <a:solidFill>
-                  <a:srgbClr val="E65100"/>
-                </a:solidFill>
-              </a:defRPr>
-            </a:pPr>
-            <a:r>
-              <a:t>3. LỖI THIẾU THƯ VIỆN TOÁN DOCKER ALPINE</a:t>
-            </a:r>
-          </a:p>
-          <a:p>
-            <a:pPr>
-              <a:spcAft>
-                <a:spcPts val="250"/>
-              </a:spcAft>
-              <a:defRPr sz="1100">
-                <a:solidFill>
-                  <a:srgbClr val="212529"/>
-                </a:solidFill>
-              </a:defRPr>
-            </a:pPr>
-            <a:r>
-              <a:t>• Khó khăn: Image bde2020 thiếu thư viện C/Fortran cho MLlib ALS.</a:t>
-            </a:r>
-          </a:p>
-          <a:p>
-            <a:pPr>
-              <a:spcAft>
-                <a:spcPts val="250"/>
-              </a:spcAft>
-              <a:defRPr sz="1100">
-                <a:solidFill>
-                  <a:srgbClr val="212529"/>
-                </a:solidFill>
-              </a:defRPr>
-            </a:pPr>
-            <a:r>
-              <a:t>• Giải pháp: Cài đặt bổ sung py3-numpy trên Master và Workers.</a:t>
-            </a:r>
-          </a:p>
-        </p:txBody>
-      </p:sp>
-      <p:sp>
-        <p:nvSpPr>
-          <p:cNvPr id="14" name="Rounded Rectangle 13"/>
-          <p:cNvSpPr/>
-          <p:nvPr/>
-        </p:nvSpPr>
-        <p:spPr>
-          <a:xfrm>
-            <a:off x="6217920" y="4023360"/>
-            <a:ext cx="5394960" cy="2377440"/>
-          </a:xfrm>
-          <a:prstGeom prst="roundRect">
-            <a:avLst/>
-          </a:prstGeom>
-          <a:solidFill>
-            <a:srgbClr val="F5F8FC"/>
-          </a:solidFill>
-          <a:ln w="12700">
-            <a:solidFill>
-              <a:srgbClr val="BBDEFB"/>
-            </a:solidFill>
-          </a:ln>
-        </p:spPr>
-        <p:style>
-          <a:lnRef idx="1">
-            <a:schemeClr val="accent1"/>
-          </a:lnRef>
-          <a:fillRef idx="3">
-            <a:schemeClr val="accent1"/>
-          </a:fillRef>
-          <a:effectRef idx="2">
-            <a:schemeClr val="accent1"/>
-          </a:effectRef>
-          <a:fontRef idx="minor">
-            <a:schemeClr val="lt1"/>
-          </a:fontRef>
-        </p:style>
-        <p:txBody>
-          <a:bodyPr rtlCol="0" anchor="ctr"/>
-          <a:lstStyle/>
-          <a:p>
-            <a:pPr algn="ctr"/>
-          </a:p>
-        </p:txBody>
-      </p:sp>
-      <p:sp>
-        <p:nvSpPr>
-          <p:cNvPr id="15" name="Rectangle 14"/>
-          <p:cNvSpPr/>
-          <p:nvPr/>
-        </p:nvSpPr>
-        <p:spPr>
-          <a:xfrm>
-            <a:off x="6217920" y="4023360"/>
-            <a:ext cx="5394960" cy="64008"/>
-          </a:xfrm>
-          <a:prstGeom prst="rect">
-            <a:avLst/>
-          </a:prstGeom>
-          <a:solidFill>
-            <a:srgbClr val="2E7D32"/>
-          </a:solidFill>
-          <a:ln>
-            <a:noFill/>
-          </a:ln>
-        </p:spPr>
-        <p:style>
-          <a:lnRef idx="1">
-            <a:schemeClr val="accent1"/>
-          </a:lnRef>
-          <a:fillRef idx="3">
-            <a:schemeClr val="accent1"/>
-          </a:fillRef>
-          <a:effectRef idx="2">
-            <a:schemeClr val="accent1"/>
-          </a:effectRef>
-          <a:fontRef idx="minor">
-            <a:schemeClr val="lt1"/>
-          </a:fontRef>
-        </p:style>
-        <p:txBody>
-          <a:bodyPr rtlCol="0" anchor="ctr"/>
-          <a:lstStyle/>
-          <a:p>
-            <a:pPr algn="ctr"/>
-          </a:p>
-        </p:txBody>
-      </p:sp>
-      <p:sp>
-        <p:nvSpPr>
-          <p:cNvPr id="16" name="TextBox 15"/>
-          <p:cNvSpPr txBox="1"/>
-          <p:nvPr/>
-        </p:nvSpPr>
-        <p:spPr>
-          <a:xfrm>
-            <a:off x="6355080" y="4133088"/>
-            <a:ext cx="5120640" cy="2212848"/>
-          </a:xfrm>
-          <a:prstGeom prst="rect">
-            <a:avLst/>
-          </a:prstGeom>
-          <a:noFill/>
-        </p:spPr>
-        <p:txBody>
-          <a:bodyPr wrap="square">
-            <a:spAutoFit/>
-          </a:bodyPr>
-          <a:lstStyle/>
-          <a:p>
-            <a:pPr>
-              <a:spcAft>
-                <a:spcPts val="400"/>
-              </a:spcAft>
-              <a:defRPr sz="1300" b="1">
-                <a:solidFill>
-                  <a:srgbClr val="2E7D32"/>
-                </a:solidFill>
-              </a:defRPr>
-            </a:pPr>
-            <a:r>
-              <a:t>4. LỖI MACOS TỰ XÓA THƯ MỤC /TMP</a:t>
-            </a:r>
-          </a:p>
-          <a:p>
-            <a:pPr>
-              <a:spcAft>
-                <a:spcPts val="250"/>
-              </a:spcAft>
-              <a:defRPr sz="1100">
-                <a:solidFill>
-                  <a:srgbClr val="212529"/>
-                </a:solidFill>
-              </a:defRPr>
-            </a:pPr>
-            <a:r>
-              <a:t>• Khó khăn: Streamlit cache Spark bị macOS xóa /tmp gây lỗi.</a:t>
-            </a:r>
-          </a:p>
-          <a:p>
-            <a:pPr>
-              <a:spcAft>
-                <a:spcPts val="250"/>
-              </a:spcAft>
-              <a:defRPr sz="1100">
-                <a:solidFill>
-                  <a:srgbClr val="212529"/>
-                </a:solidFill>
-              </a:defRPr>
-            </a:pPr>
-            <a:r>
-              <a:t>• Giải pháp: Cấu hình biến TMPDIR và spark.local.dir về ./.spark_temp.</a:t>
+            <a:pPr algn="ctr">
+              <a:defRPr sz="1000" i="1">
+                <a:solidFill>
+                  <a:srgbClr val="6C757D"/>
+                </a:solidFill>
+              </a:defRPr>
+            </a:pPr>
+            <a:r>
+              <a:t>So sánh: Spark ALS (0.021) cải thiện độ chính xác +75.3% so với Baseline (0.085)</a:t>
             </a:r>
           </a:p>
         </p:txBody>
@@ -5201,7 +4852,7 @@
               </a:defRPr>
             </a:pPr>
             <a:r>
-              <a:t>PHẦN 5: DEMO &amp; DASHBOARD (3 - 4 PHÚT)  |  Slide 12/15</a:t>
+              <a:t>PHẦN 4: XỬ LÝ DỮ LIỆU - ETL (3 - 4 PHÚT)  |  Slide 12/16</a:t>
             </a:r>
           </a:p>
         </p:txBody>
@@ -5236,80 +4887,21 @@
               </a:defRPr>
             </a:pPr>
             <a:r>
-              <a:t>5.1. GIẢI QUYẾT BÀI TOÁN COLD-START &amp; INSIGHT KINH DOANH</a:t>
-            </a:r>
-          </a:p>
-        </p:txBody>
-      </p:sp>
-      <p:pic>
-        <p:nvPicPr>
-          <p:cNvPr id="5" name="Picture 4" descr="9_Top10_ColdStart_Products.png"/>
-          <p:cNvPicPr>
-            <a:picLocks noChangeAspect="1"/>
-          </p:cNvPicPr>
-          <p:nvPr/>
-        </p:nvPicPr>
-        <p:blipFill>
-          <a:blip r:embed="rId3"/>
-          <a:stretch>
-            <a:fillRect/>
-          </a:stretch>
-        </p:blipFill>
+              <a:t>4.4. ĐIỂM NHẤN KỸ THUẬT: KHÓ KHĂN TRÀN RAM &amp; GIẢI PHÁP</a:t>
+            </a:r>
+          </a:p>
+        </p:txBody>
+      </p:sp>
+      <p:sp>
+        <p:nvSpPr>
+          <p:cNvPr id="5" name="Rounded Rectangle 4"/>
+          <p:cNvSpPr/>
+          <p:nvPr/>
+        </p:nvSpPr>
         <p:spPr>
           <a:xfrm>
             <a:off x="548640" y="1463040"/>
-            <a:ext cx="5669280" cy="4754880"/>
-          </a:xfrm>
-          <a:prstGeom prst="rect">
-            <a:avLst/>
-          </a:prstGeom>
-        </p:spPr>
-      </p:pic>
-      <p:sp>
-        <p:nvSpPr>
-          <p:cNvPr id="6" name="TextBox 5"/>
-          <p:cNvSpPr txBox="1"/>
-          <p:nvPr/>
-        </p:nvSpPr>
-        <p:spPr>
-          <a:xfrm>
-            <a:off x="548640" y="6263640"/>
-            <a:ext cx="5669280" cy="274320"/>
-          </a:xfrm>
-          <a:prstGeom prst="rect">
-            <a:avLst/>
-          </a:prstGeom>
-          <a:noFill/>
-        </p:spPr>
-        <p:txBody>
-          <a:bodyPr wrap="none">
-            <a:spAutoFit/>
-          </a:bodyPr>
-          <a:lstStyle/>
-          <a:p>
-            <a:pPr algn="ctr">
-              <a:defRPr sz="1000" i="1">
-                <a:solidFill>
-                  <a:srgbClr val="6C757D"/>
-                </a:solidFill>
-              </a:defRPr>
-            </a:pPr>
-            <a:r>
-              <a:t>Top 10 sản phẩm thịnh hành trích xuất bằng Spark SQL</a:t>
-            </a:r>
-          </a:p>
-        </p:txBody>
-      </p:sp>
-      <p:sp>
-        <p:nvSpPr>
-          <p:cNvPr id="7" name="Rounded Rectangle 6"/>
-          <p:cNvSpPr/>
-          <p:nvPr/>
-        </p:nvSpPr>
-        <p:spPr>
-          <a:xfrm>
-            <a:off x="6400800" y="1463040"/>
-            <a:ext cx="5212080" cy="2377440"/>
+            <a:ext cx="5394960" cy="2377440"/>
           </a:xfrm>
           <a:prstGeom prst="roundRect">
             <a:avLst/>
@@ -5347,20 +4939,20 @@
       </p:sp>
       <p:sp>
         <p:nvSpPr>
-          <p:cNvPr id="8" name="Rectangle 7"/>
+          <p:cNvPr id="6" name="Rectangle 5"/>
           <p:cNvSpPr/>
           <p:nvPr/>
         </p:nvSpPr>
         <p:spPr>
           <a:xfrm>
-            <a:off x="6400800" y="1463040"/>
-            <a:ext cx="5212080" cy="64008"/>
+            <a:off x="548640" y="1463040"/>
+            <a:ext cx="5394960" cy="64008"/>
           </a:xfrm>
           <a:prstGeom prst="rect">
             <a:avLst/>
           </a:prstGeom>
           <a:solidFill>
-            <a:srgbClr val="1565C0"/>
+            <a:srgbClr val="D32F2F"/>
           </a:solidFill>
           <a:ln>
             <a:noFill/>
@@ -5390,14 +4982,14 @@
       </p:sp>
       <p:sp>
         <p:nvSpPr>
-          <p:cNvPr id="9" name="TextBox 8"/>
+          <p:cNvPr id="7" name="TextBox 6"/>
           <p:cNvSpPr txBox="1"/>
           <p:nvPr/>
         </p:nvSpPr>
         <p:spPr>
           <a:xfrm>
-            <a:off x="6537960" y="1572768"/>
-            <a:ext cx="4937760" cy="2212848"/>
+            <a:off x="685800" y="1572768"/>
+            <a:ext cx="5120640" cy="2212848"/>
           </a:xfrm>
           <a:prstGeom prst="rect">
             <a:avLst/>
@@ -5416,12 +5008,12 @@
               </a:spcAft>
               <a:defRPr sz="1300" b="1">
                 <a:solidFill>
-                  <a:srgbClr val="1565C0"/>
-                </a:solidFill>
-              </a:defRPr>
-            </a:pPr>
-            <a:r>
-              <a:t>CHIẾN LƯỢC HYBRID FALLBACK</a:t>
+                  <a:srgbClr val="D32F2F"/>
+                </a:solidFill>
+              </a:defRPr>
+            </a:pPr>
+            <a:r>
+              <a:t>1. TRÀN RAM KHI SHUFFLE / TRAIN ALS</a:t>
             </a:r>
           </a:p>
           <a:p>
@@ -5436,7 +5028,7 @@
               </a:defRPr>
             </a:pPr>
             <a:r>
-              <a:t>• Vấn đề Cold-Start: Khách mới chưa có lịch sử tương tác trong ALS.</a:t>
+              <a:t>• Khó khăn: Gom nhóm 2.75M dòng và giải ALS gây áp lực JVM.</a:t>
             </a:r>
           </a:p>
           <a:p>
@@ -5451,21 +5043,21 @@
               </a:defRPr>
             </a:pPr>
             <a:r>
-              <a:t>• Giải pháp: Dùng Spark SQL truy vấn bảng events_table tìm Top 10 sản phẩm tương tác cao nhất làm gợi ý mặc định.</a:t>
-            </a:r>
-          </a:p>
-        </p:txBody>
-      </p:sp>
-      <p:sp>
-        <p:nvSpPr>
-          <p:cNvPr id="10" name="Rounded Rectangle 9"/>
+              <a:t>• Giải pháp: Cấp --driver-memory 4g; đọc Parquet (72MB) thay vì CSV.</a:t>
+            </a:r>
+          </a:p>
+        </p:txBody>
+      </p:sp>
+      <p:sp>
+        <p:nvSpPr>
+          <p:cNvPr id="8" name="Rounded Rectangle 7"/>
           <p:cNvSpPr/>
           <p:nvPr/>
         </p:nvSpPr>
         <p:spPr>
           <a:xfrm>
-            <a:off x="6400800" y="4023360"/>
-            <a:ext cx="5212080" cy="2377440"/>
+            <a:off x="6217920" y="1463040"/>
+            <a:ext cx="5394960" cy="2377440"/>
           </a:xfrm>
           <a:prstGeom prst="roundRect">
             <a:avLst/>
@@ -5503,14 +5095,326 @@
       </p:sp>
       <p:sp>
         <p:nvSpPr>
-          <p:cNvPr id="11" name="Rectangle 10"/>
+          <p:cNvPr id="9" name="Rectangle 8"/>
           <p:cNvSpPr/>
           <p:nvPr/>
         </p:nvSpPr>
         <p:spPr>
           <a:xfrm>
-            <a:off x="6400800" y="4023360"/>
-            <a:ext cx="5212080" cy="64008"/>
+            <a:off x="6217920" y="1463040"/>
+            <a:ext cx="5394960" cy="64008"/>
+          </a:xfrm>
+          <a:prstGeom prst="rect">
+            <a:avLst/>
+          </a:prstGeom>
+          <a:solidFill>
+            <a:srgbClr val="1565C0"/>
+          </a:solidFill>
+          <a:ln>
+            <a:noFill/>
+          </a:ln>
+        </p:spPr>
+        <p:style>
+          <a:lnRef idx="1">
+            <a:schemeClr val="accent1"/>
+          </a:lnRef>
+          <a:fillRef idx="3">
+            <a:schemeClr val="accent1"/>
+          </a:fillRef>
+          <a:effectRef idx="2">
+            <a:schemeClr val="accent1"/>
+          </a:effectRef>
+          <a:fontRef idx="minor">
+            <a:schemeClr val="lt1"/>
+          </a:fontRef>
+        </p:style>
+        <p:txBody>
+          <a:bodyPr rtlCol="0" anchor="ctr"/>
+          <a:lstStyle/>
+          <a:p>
+            <a:pPr algn="ctr"/>
+          </a:p>
+        </p:txBody>
+      </p:sp>
+      <p:sp>
+        <p:nvSpPr>
+          <p:cNvPr id="10" name="TextBox 9"/>
+          <p:cNvSpPr txBox="1"/>
+          <p:nvPr/>
+        </p:nvSpPr>
+        <p:spPr>
+          <a:xfrm>
+            <a:off x="6355080" y="1572768"/>
+            <a:ext cx="5120640" cy="2212848"/>
+          </a:xfrm>
+          <a:prstGeom prst="rect">
+            <a:avLst/>
+          </a:prstGeom>
+          <a:noFill/>
+        </p:spPr>
+        <p:txBody>
+          <a:bodyPr wrap="square">
+            <a:spAutoFit/>
+          </a:bodyPr>
+          <a:lstStyle/>
+          <a:p>
+            <a:pPr>
+              <a:spcAft>
+                <a:spcPts val="400"/>
+              </a:spcAft>
+              <a:defRPr sz="1300" b="1">
+                <a:solidFill>
+                  <a:srgbClr val="1565C0"/>
+                </a:solidFill>
+              </a:defRPr>
+            </a:pPr>
+            <a:r>
+              <a:t>2. TẠI SAO CHỌN ALS THAY VÌ SGD?</a:t>
+            </a:r>
+          </a:p>
+          <a:p>
+            <a:pPr>
+              <a:spcAft>
+                <a:spcPts val="250"/>
+              </a:spcAft>
+              <a:defRPr sz="1100">
+                <a:solidFill>
+                  <a:srgbClr val="212529"/>
+                </a:solidFill>
+              </a:defRPr>
+            </a:pPr>
+            <a:r>
+              <a:t>• Khó khăn: SGD đồng bộ trọng số qua mạng gây nghẽn cổ chai.</a:t>
+            </a:r>
+          </a:p>
+          <a:p>
+            <a:pPr>
+              <a:spcAft>
+                <a:spcPts val="250"/>
+              </a:spcAft>
+              <a:defRPr sz="1100">
+                <a:solidFill>
+                  <a:srgbClr val="212529"/>
+                </a:solidFill>
+              </a:defRPr>
+            </a:pPr>
+            <a:r>
+              <a:t>• Giải pháp: ALS cố định V giúp giải vector U độc lập, song song 100%.</a:t>
+            </a:r>
+          </a:p>
+        </p:txBody>
+      </p:sp>
+      <p:sp>
+        <p:nvSpPr>
+          <p:cNvPr id="11" name="Rounded Rectangle 10"/>
+          <p:cNvSpPr/>
+          <p:nvPr/>
+        </p:nvSpPr>
+        <p:spPr>
+          <a:xfrm>
+            <a:off x="548640" y="4023360"/>
+            <a:ext cx="5394960" cy="2377440"/>
+          </a:xfrm>
+          <a:prstGeom prst="roundRect">
+            <a:avLst/>
+          </a:prstGeom>
+          <a:solidFill>
+            <a:srgbClr val="F5F8FC"/>
+          </a:solidFill>
+          <a:ln w="12700">
+            <a:solidFill>
+              <a:srgbClr val="BBDEFB"/>
+            </a:solidFill>
+          </a:ln>
+        </p:spPr>
+        <p:style>
+          <a:lnRef idx="1">
+            <a:schemeClr val="accent1"/>
+          </a:lnRef>
+          <a:fillRef idx="3">
+            <a:schemeClr val="accent1"/>
+          </a:fillRef>
+          <a:effectRef idx="2">
+            <a:schemeClr val="accent1"/>
+          </a:effectRef>
+          <a:fontRef idx="minor">
+            <a:schemeClr val="lt1"/>
+          </a:fontRef>
+        </p:style>
+        <p:txBody>
+          <a:bodyPr rtlCol="0" anchor="ctr"/>
+          <a:lstStyle/>
+          <a:p>
+            <a:pPr algn="ctr"/>
+          </a:p>
+        </p:txBody>
+      </p:sp>
+      <p:sp>
+        <p:nvSpPr>
+          <p:cNvPr id="12" name="Rectangle 11"/>
+          <p:cNvSpPr/>
+          <p:nvPr/>
+        </p:nvSpPr>
+        <p:spPr>
+          <a:xfrm>
+            <a:off x="548640" y="4023360"/>
+            <a:ext cx="5394960" cy="64008"/>
+          </a:xfrm>
+          <a:prstGeom prst="rect">
+            <a:avLst/>
+          </a:prstGeom>
+          <a:solidFill>
+            <a:srgbClr val="E65100"/>
+          </a:solidFill>
+          <a:ln>
+            <a:noFill/>
+          </a:ln>
+        </p:spPr>
+        <p:style>
+          <a:lnRef idx="1">
+            <a:schemeClr val="accent1"/>
+          </a:lnRef>
+          <a:fillRef idx="3">
+            <a:schemeClr val="accent1"/>
+          </a:fillRef>
+          <a:effectRef idx="2">
+            <a:schemeClr val="accent1"/>
+          </a:effectRef>
+          <a:fontRef idx="minor">
+            <a:schemeClr val="lt1"/>
+          </a:fontRef>
+        </p:style>
+        <p:txBody>
+          <a:bodyPr rtlCol="0" anchor="ctr"/>
+          <a:lstStyle/>
+          <a:p>
+            <a:pPr algn="ctr"/>
+          </a:p>
+        </p:txBody>
+      </p:sp>
+      <p:sp>
+        <p:nvSpPr>
+          <p:cNvPr id="13" name="TextBox 12"/>
+          <p:cNvSpPr txBox="1"/>
+          <p:nvPr/>
+        </p:nvSpPr>
+        <p:spPr>
+          <a:xfrm>
+            <a:off x="685800" y="4133088"/>
+            <a:ext cx="5120640" cy="2212848"/>
+          </a:xfrm>
+          <a:prstGeom prst="rect">
+            <a:avLst/>
+          </a:prstGeom>
+          <a:noFill/>
+        </p:spPr>
+        <p:txBody>
+          <a:bodyPr wrap="square">
+            <a:spAutoFit/>
+          </a:bodyPr>
+          <a:lstStyle/>
+          <a:p>
+            <a:pPr>
+              <a:spcAft>
+                <a:spcPts val="400"/>
+              </a:spcAft>
+              <a:defRPr sz="1300" b="1">
+                <a:solidFill>
+                  <a:srgbClr val="E65100"/>
+                </a:solidFill>
+              </a:defRPr>
+            </a:pPr>
+            <a:r>
+              <a:t>3. LỖI THIẾU THƯ VIỆN TOÁN DOCKER ALPINE</a:t>
+            </a:r>
+          </a:p>
+          <a:p>
+            <a:pPr>
+              <a:spcAft>
+                <a:spcPts val="250"/>
+              </a:spcAft>
+              <a:defRPr sz="1100">
+                <a:solidFill>
+                  <a:srgbClr val="212529"/>
+                </a:solidFill>
+              </a:defRPr>
+            </a:pPr>
+            <a:r>
+              <a:t>• Khó khăn: Image bde2020 thiếu thư viện C/Fortran cho MLlib ALS.</a:t>
+            </a:r>
+          </a:p>
+          <a:p>
+            <a:pPr>
+              <a:spcAft>
+                <a:spcPts val="250"/>
+              </a:spcAft>
+              <a:defRPr sz="1100">
+                <a:solidFill>
+                  <a:srgbClr val="212529"/>
+                </a:solidFill>
+              </a:defRPr>
+            </a:pPr>
+            <a:r>
+              <a:t>• Giải pháp: Cài đặt bổ sung py3-numpy trên Master và Workers.</a:t>
+            </a:r>
+          </a:p>
+        </p:txBody>
+      </p:sp>
+      <p:sp>
+        <p:nvSpPr>
+          <p:cNvPr id="14" name="Rounded Rectangle 13"/>
+          <p:cNvSpPr/>
+          <p:nvPr/>
+        </p:nvSpPr>
+        <p:spPr>
+          <a:xfrm>
+            <a:off x="6217920" y="4023360"/>
+            <a:ext cx="5394960" cy="2377440"/>
+          </a:xfrm>
+          <a:prstGeom prst="roundRect">
+            <a:avLst/>
+          </a:prstGeom>
+          <a:solidFill>
+            <a:srgbClr val="F5F8FC"/>
+          </a:solidFill>
+          <a:ln w="12700">
+            <a:solidFill>
+              <a:srgbClr val="BBDEFB"/>
+            </a:solidFill>
+          </a:ln>
+        </p:spPr>
+        <p:style>
+          <a:lnRef idx="1">
+            <a:schemeClr val="accent1"/>
+          </a:lnRef>
+          <a:fillRef idx="3">
+            <a:schemeClr val="accent1"/>
+          </a:fillRef>
+          <a:effectRef idx="2">
+            <a:schemeClr val="accent1"/>
+          </a:effectRef>
+          <a:fontRef idx="minor">
+            <a:schemeClr val="lt1"/>
+          </a:fontRef>
+        </p:style>
+        <p:txBody>
+          <a:bodyPr rtlCol="0" anchor="ctr"/>
+          <a:lstStyle/>
+          <a:p>
+            <a:pPr algn="ctr"/>
+          </a:p>
+        </p:txBody>
+      </p:sp>
+      <p:sp>
+        <p:nvSpPr>
+          <p:cNvPr id="15" name="Rectangle 14"/>
+          <p:cNvSpPr/>
+          <p:nvPr/>
+        </p:nvSpPr>
+        <p:spPr>
+          <a:xfrm>
+            <a:off x="6217920" y="4023360"/>
+            <a:ext cx="5394960" cy="64008"/>
           </a:xfrm>
           <a:prstGeom prst="rect">
             <a:avLst/>
@@ -5546,14 +5450,14 @@
       </p:sp>
       <p:sp>
         <p:nvSpPr>
-          <p:cNvPr id="12" name="TextBox 11"/>
+          <p:cNvPr id="16" name="TextBox 15"/>
           <p:cNvSpPr txBox="1"/>
           <p:nvPr/>
         </p:nvSpPr>
         <p:spPr>
           <a:xfrm>
-            <a:off x="6537960" y="4133088"/>
-            <a:ext cx="4937760" cy="2212848"/>
+            <a:off x="6355080" y="4133088"/>
+            <a:ext cx="5120640" cy="2212848"/>
           </a:xfrm>
           <a:prstGeom prst="rect">
             <a:avLst/>
@@ -5577,7 +5481,7 @@
               </a:defRPr>
             </a:pPr>
             <a:r>
-              <a:t>INSIGHT KINH DOANH TỪ DỮ LIỆU LỚN</a:t>
+              <a:t>4. LỖI MACOS TỰ XÓA THƯ MỤC /TMP</a:t>
             </a:r>
           </a:p>
           <a:p>
@@ -5592,7 +5496,7 @@
               </a:defRPr>
             </a:pPr>
             <a:r>
-              <a:t>• Sản phẩm dẫn đầu: Item #187946 (3,412 lượt), Item #461686 (2,978 lượt).</a:t>
+              <a:t>• Khó khăn: Streamlit cache Spark bị macOS xóa /tmp gây lỗi.</a:t>
             </a:r>
           </a:p>
           <a:p>
@@ -5607,7 +5511,7 @@
               </a:defRPr>
             </a:pPr>
             <a:r>
-              <a:t>• Tối ưu UX: Tỷ lệ Xem (96.67%) sang Mua (0.81%) thấp -&gt; Đặt khung gợi ý AI ngay dưới nút 'Thêm vào giỏ' để kích cầu mua chéo.</a:t>
+              <a:t>• Giải pháp: Cấu hình biến TMPDIR và spark.local.dir về ./.spark_temp.</a:t>
             </a:r>
           </a:p>
         </p:txBody>
@@ -5684,7 +5588,7 @@
               </a:defRPr>
             </a:pPr>
             <a:r>
-              <a:t>PHẦN 5: DEMO &amp; DASHBOARD (3 - 4 PHÚT)  |  Slide 13/15</a:t>
+              <a:t>PHẦN 5: DEMO &amp; DASHBOARD (3 - 4 PHÚT)  |  Slide 13/16</a:t>
             </a:r>
           </a:p>
         </p:txBody>
@@ -5719,14 +5623,14 @@
               </a:defRPr>
             </a:pPr>
             <a:r>
-              <a:t>5.2. DEMO HỆ THỐNG WEB APP SERVING TRÊN STREAMLIT</a:t>
+              <a:t>5.1. GIẢI QUYẾT BÀI TOÁN COLD-START &amp; INSIGHT KINH DOANH</a:t>
             </a:r>
           </a:p>
         </p:txBody>
       </p:sp>
       <p:pic>
         <p:nvPicPr>
-          <p:cNvPr id="5" name="Picture 4" descr="3_Streamlit_App.png"/>
+          <p:cNvPr id="5" name="Picture 4" descr="9_Top10_ColdStart_Products.png"/>
           <p:cNvPicPr>
             <a:picLocks noChangeAspect="1"/>
           </p:cNvPicPr>
@@ -5778,7 +5682,7 @@
               </a:defRPr>
             </a:pPr>
             <a:r>
-              <a:t>Giao diện Web App Streamlit (Port 8501)</a:t>
+              <a:t>Top 10 sản phẩm thịnh hành trích xuất bằng Spark SQL</a:t>
             </a:r>
           </a:p>
         </p:txBody>
@@ -5843,7 +5747,7 @@
             <a:avLst/>
           </a:prstGeom>
           <a:solidFill>
-            <a:srgbClr val="0D3B66"/>
+            <a:srgbClr val="1565C0"/>
           </a:solidFill>
           <a:ln>
             <a:noFill/>
@@ -5899,12 +5803,12 @@
               </a:spcAft>
               <a:defRPr sz="1300" b="1">
                 <a:solidFill>
-                  <a:srgbClr val="0D3B66"/>
-                </a:solidFill>
-              </a:defRPr>
-            </a:pPr>
-            <a:r>
-              <a:t>KIẾN TRÚC ONLINE SERVING ĐỘ TRỄ THẤP</a:t>
+                  <a:srgbClr val="1565C0"/>
+                </a:solidFill>
+              </a:defRPr>
+            </a:pPr>
+            <a:r>
+              <a:t>CHIẾN LƯỢC HYBRID FALLBACK</a:t>
             </a:r>
           </a:p>
           <a:p>
@@ -5919,7 +5823,7 @@
               </a:defRPr>
             </a:pPr>
             <a:r>
-              <a:t>• Tách biệt Offline Training (trên HDFS/Spark) và Online Serving.</a:t>
+              <a:t>• Vấn đề Cold-Start: Khách mới chưa có lịch sử tương tác trong ALS.</a:t>
             </a:r>
           </a:p>
           <a:p>
@@ -5934,7 +5838,7 @@
               </a:defRPr>
             </a:pPr>
             <a:r>
-              <a:t>• Web App nạp trực tiếp model (/spark/models/als_model_final) lên RAM để tính tích vô hướng tức thì trong vài mili-giây.</a:t>
+              <a:t>• Giải pháp: Dùng Spark SQL truy vấn bảng events_table tìm Top 10 sản phẩm tương tác cao nhất làm gợi ý mặc định.</a:t>
             </a:r>
           </a:p>
         </p:txBody>
@@ -5999,7 +5903,7 @@
             <a:avLst/>
           </a:prstGeom>
           <a:solidFill>
-            <a:srgbClr val="E65100"/>
+            <a:srgbClr val="2E7D32"/>
           </a:solidFill>
           <a:ln>
             <a:noFill/>
@@ -6055,12 +5959,12 @@
               </a:spcAft>
               <a:defRPr sz="1300" b="1">
                 <a:solidFill>
-                  <a:srgbClr val="E65100"/>
-                </a:solidFill>
-              </a:defRPr>
-            </a:pPr>
-            <a:r>
-              <a:t>KỊCH BẢN DEMO TRỰC TIẾP TRƯỚC HỘI ĐỒNG</a:t>
+                  <a:srgbClr val="2E7D32"/>
+                </a:solidFill>
+              </a:defRPr>
+            </a:pPr>
+            <a:r>
+              <a:t>INSIGHT KINH DOANH TỪ DỮ LIỆU LỚN</a:t>
             </a:r>
           </a:p>
           <a:p>
@@ -6075,7 +5979,7 @@
               </a:defRPr>
             </a:pPr>
             <a:r>
-              <a:t>• Trường hợp 1 (Khách cũ - VD: ID 147545): Gọi recommendForUserSubset() hiển thị Top SP cá nhân hóa kèm Latent Score.</a:t>
+              <a:t>• Sản phẩm dẫn đầu: Item #187946 (3,412 lượt), Item #461686 (2,978 lượt).</a:t>
             </a:r>
           </a:p>
           <a:p>
@@ -6090,7 +5994,7 @@
               </a:defRPr>
             </a:pPr>
             <a:r>
-              <a:t>• Trường hợp 2 (Khách mới - Cold-Start): Tự động kích hoạt Fallback hiển thị Top sản phẩm Trending từ Spark SQL.</a:t>
+              <a:t>• Tối ưu UX: Tỷ lệ Xem (96.67%) sang Mua (0.81%) thấp -&gt; Đặt khung gợi ý AI ngay dưới nút 'Thêm vào giỏ' để kích cầu mua chéo.</a:t>
             </a:r>
           </a:p>
         </p:txBody>
@@ -6167,7 +6071,7 @@
               </a:defRPr>
             </a:pPr>
             <a:r>
-              <a:t>PHẦN 6: KẾT LUẬN &amp; Q&amp;A (1 - 2 PHÚT)  |  Slide 14/15</a:t>
+              <a:t>PHẦN 5: DEMO &amp; DASHBOARD (3 - 4 PHÚT)  |  Slide 14/16</a:t>
             </a:r>
           </a:p>
         </p:txBody>
@@ -6202,21 +6106,80 @@
               </a:defRPr>
             </a:pPr>
             <a:r>
-              <a:t>6.1. ĐÁNH GIÁ KẾT QUẢ, GIỚI HẠN &amp; HƯỚNG MỞ RỘNG</a:t>
-            </a:r>
-          </a:p>
-        </p:txBody>
-      </p:sp>
-      <p:sp>
-        <p:nvSpPr>
-          <p:cNvPr id="5" name="Rounded Rectangle 4"/>
+              <a:t>5.2. DEMO HỆ THỐNG WEB APP SERVING TRÊN STREAMLIT</a:t>
+            </a:r>
+          </a:p>
+        </p:txBody>
+      </p:sp>
+      <p:pic>
+        <p:nvPicPr>
+          <p:cNvPr id="5" name="Picture 4" descr="3_Streamlit_App.png"/>
+          <p:cNvPicPr>
+            <a:picLocks noChangeAspect="1"/>
+          </p:cNvPicPr>
+          <p:nvPr/>
+        </p:nvPicPr>
+        <p:blipFill>
+          <a:blip r:embed="rId3"/>
+          <a:stretch>
+            <a:fillRect/>
+          </a:stretch>
+        </p:blipFill>
+        <p:spPr>
+          <a:xfrm>
+            <a:off x="548640" y="1463040"/>
+            <a:ext cx="5669280" cy="4754880"/>
+          </a:xfrm>
+          <a:prstGeom prst="rect">
+            <a:avLst/>
+          </a:prstGeom>
+        </p:spPr>
+      </p:pic>
+      <p:sp>
+        <p:nvSpPr>
+          <p:cNvPr id="6" name="TextBox 5"/>
+          <p:cNvSpPr txBox="1"/>
+          <p:nvPr/>
+        </p:nvSpPr>
+        <p:spPr>
+          <a:xfrm>
+            <a:off x="548640" y="6263640"/>
+            <a:ext cx="5669280" cy="274320"/>
+          </a:xfrm>
+          <a:prstGeom prst="rect">
+            <a:avLst/>
+          </a:prstGeom>
+          <a:noFill/>
+        </p:spPr>
+        <p:txBody>
+          <a:bodyPr wrap="none">
+            <a:spAutoFit/>
+          </a:bodyPr>
+          <a:lstStyle/>
+          <a:p>
+            <a:pPr algn="ctr">
+              <a:defRPr sz="1000" i="1">
+                <a:solidFill>
+                  <a:srgbClr val="6C757D"/>
+                </a:solidFill>
+              </a:defRPr>
+            </a:pPr>
+            <a:r>
+              <a:t>Giao diện Web App Streamlit (Port 8501)</a:t>
+            </a:r>
+          </a:p>
+        </p:txBody>
+      </p:sp>
+      <p:sp>
+        <p:nvSpPr>
+          <p:cNvPr id="7" name="Rounded Rectangle 6"/>
           <p:cNvSpPr/>
           <p:nvPr/>
         </p:nvSpPr>
         <p:spPr>
           <a:xfrm>
-            <a:off x="548640" y="1463040"/>
-            <a:ext cx="3566160" cy="4937760"/>
+            <a:off x="6400800" y="1463040"/>
+            <a:ext cx="5212080" cy="2377440"/>
           </a:xfrm>
           <a:prstGeom prst="roundRect">
             <a:avLst/>
@@ -6254,20 +6217,20 @@
       </p:sp>
       <p:sp>
         <p:nvSpPr>
-          <p:cNvPr id="6" name="Rectangle 5"/>
+          <p:cNvPr id="8" name="Rectangle 7"/>
           <p:cNvSpPr/>
           <p:nvPr/>
         </p:nvSpPr>
         <p:spPr>
           <a:xfrm>
-            <a:off x="548640" y="1463040"/>
-            <a:ext cx="3566160" cy="64008"/>
+            <a:off x="6400800" y="1463040"/>
+            <a:ext cx="5212080" cy="64008"/>
           </a:xfrm>
           <a:prstGeom prst="rect">
             <a:avLst/>
           </a:prstGeom>
           <a:solidFill>
-            <a:srgbClr val="2E7D32"/>
+            <a:srgbClr val="0D3B66"/>
           </a:solidFill>
           <a:ln>
             <a:noFill/>
@@ -6297,14 +6260,14 @@
       </p:sp>
       <p:sp>
         <p:nvSpPr>
-          <p:cNvPr id="7" name="TextBox 6"/>
+          <p:cNvPr id="9" name="TextBox 8"/>
           <p:cNvSpPr txBox="1"/>
           <p:nvPr/>
         </p:nvSpPr>
         <p:spPr>
           <a:xfrm>
-            <a:off x="685800" y="1572768"/>
-            <a:ext cx="3291840" cy="4773168"/>
+            <a:off x="6537960" y="1572768"/>
+            <a:ext cx="4937760" cy="2212848"/>
           </a:xfrm>
           <a:prstGeom prst="rect">
             <a:avLst/>
@@ -6323,12 +6286,12 @@
               </a:spcAft>
               <a:defRPr sz="1300" b="1">
                 <a:solidFill>
-                  <a:srgbClr val="2E7D32"/>
-                </a:solidFill>
-              </a:defRPr>
-            </a:pPr>
-            <a:r>
-              <a:t>NHỮNG GÌ ĐÃ LÀM ĐƯỢC</a:t>
+                  <a:srgbClr val="0D3B66"/>
+                </a:solidFill>
+              </a:defRPr>
+            </a:pPr>
+            <a:r>
+              <a:t>KIẾN TRÚC ONLINE SERVING ĐỘ TRỄ THẤP</a:t>
             </a:r>
           </a:p>
           <a:p>
@@ -6343,7 +6306,7 @@
               </a:defRPr>
             </a:pPr>
             <a:r>
-              <a:t>• Hoàn chỉnh cụm Docker Hadoop HDFS (2 DataNodes) &amp; Spark (2 Workers).</a:t>
+              <a:t>• Tách biệt Offline Training (trên HDFS/Spark) và Online Serving.</a:t>
             </a:r>
           </a:p>
           <a:p>
@@ -6358,51 +6321,21 @@
               </a:defRPr>
             </a:pPr>
             <a:r>
-              <a:t>• Xử lý 2.75M dòng log; Parquet giảm 94.9% dung lượng, tăng tốc đọc 13.2 lần.</a:t>
-            </a:r>
-          </a:p>
-          <a:p>
-            <a:pPr>
-              <a:spcAft>
-                <a:spcPts val="250"/>
-              </a:spcAft>
-              <a:defRPr sz="1100">
-                <a:solidFill>
-                  <a:srgbClr val="212529"/>
-                </a:solidFill>
-              </a:defRPr>
-            </a:pPr>
-            <a:r>
-              <a:t>• Mô hình ALS đạt RMSE ~ 0.021 (+75.2% vs Baseline), khắc phục Cold-Start.</a:t>
-            </a:r>
-          </a:p>
-          <a:p>
-            <a:pPr>
-              <a:spcAft>
-                <a:spcPts val="250"/>
-              </a:spcAft>
-              <a:defRPr sz="1100">
-                <a:solidFill>
-                  <a:srgbClr val="212529"/>
-                </a:solidFill>
-              </a:defRPr>
-            </a:pPr>
-            <a:r>
-              <a:t>• Tự động hóa bằng Airflow DAG (5/5 tasks SUCCESS), mô phỏng Kafka Streaming.</a:t>
-            </a:r>
-          </a:p>
-        </p:txBody>
-      </p:sp>
-      <p:sp>
-        <p:nvSpPr>
-          <p:cNvPr id="8" name="Rounded Rectangle 7"/>
+              <a:t>• Web App nạp trực tiếp model (/spark/models/als_model_final) lên RAM để tính tích vô hướng tức thì trong vài mili-giây.</a:t>
+            </a:r>
+          </a:p>
+        </p:txBody>
+      </p:sp>
+      <p:sp>
+        <p:nvSpPr>
+          <p:cNvPr id="10" name="Rounded Rectangle 9"/>
           <p:cNvSpPr/>
           <p:nvPr/>
         </p:nvSpPr>
         <p:spPr>
           <a:xfrm>
-            <a:off x="4297680" y="1463040"/>
-            <a:ext cx="3566160" cy="4937760"/>
+            <a:off x="6400800" y="4023360"/>
+            <a:ext cx="5212080" cy="2377440"/>
           </a:xfrm>
           <a:prstGeom prst="roundRect">
             <a:avLst/>
@@ -6440,14 +6373,14 @@
       </p:sp>
       <p:sp>
         <p:nvSpPr>
-          <p:cNvPr id="9" name="Rectangle 8"/>
+          <p:cNvPr id="11" name="Rectangle 10"/>
           <p:cNvSpPr/>
           <p:nvPr/>
         </p:nvSpPr>
         <p:spPr>
           <a:xfrm>
-            <a:off x="4297680" y="1463040"/>
-            <a:ext cx="3566160" cy="64008"/>
+            <a:off x="6400800" y="4023360"/>
+            <a:ext cx="5212080" cy="64008"/>
           </a:xfrm>
           <a:prstGeom prst="rect">
             <a:avLst/>
@@ -6483,14 +6416,14 @@
       </p:sp>
       <p:sp>
         <p:nvSpPr>
-          <p:cNvPr id="10" name="TextBox 9"/>
+          <p:cNvPr id="12" name="TextBox 11"/>
           <p:cNvSpPr txBox="1"/>
           <p:nvPr/>
         </p:nvSpPr>
         <p:spPr>
           <a:xfrm>
-            <a:off x="4434840" y="1572768"/>
-            <a:ext cx="3291840" cy="4773168"/>
+            <a:off x="6537960" y="4133088"/>
+            <a:ext cx="4937760" cy="2212848"/>
           </a:xfrm>
           <a:prstGeom prst="rect">
             <a:avLst/>
@@ -6514,7 +6447,7 @@
               </a:defRPr>
             </a:pPr>
             <a:r>
-              <a:t>GIỚI HẠN PHẦN CỨNG</a:t>
+              <a:t>KỊCH BẢN DEMO TRỰC TIẾP TRƯỚC HỘI ĐỒNG</a:t>
             </a:r>
           </a:p>
           <a:p>
@@ -6529,7 +6462,7 @@
               </a:defRPr>
             </a:pPr>
             <a:r>
-              <a:t>• Containers chạy ảo hóa trên 1 máy cá nhân duy nhất (chia sẻ CPU và RAM).</a:t>
+              <a:t>• Trường hợp 1 (Khách cũ - VD: ID 147545): Gọi recommendForUserSubset() hiển thị Top SP cá nhân hóa kèm Latent Score.</a:t>
             </a:r>
           </a:p>
           <a:p>
@@ -6544,193 +6477,7 @@
               </a:defRPr>
             </a:pPr>
             <a:r>
-              <a:t>• Dung lượng RAM cấp phát cho Spark Worker (6.7 GiB) giới hạn khi mở rộng dữ liệu lớn hơn.</a:t>
-            </a:r>
-          </a:p>
-          <a:p>
-            <a:pPr>
-              <a:spcAft>
-                <a:spcPts val="250"/>
-              </a:spcAft>
-              <a:defRPr sz="1100">
-                <a:solidFill>
-                  <a:srgbClr val="212529"/>
-                </a:solidFill>
-              </a:defRPr>
-            </a:pPr>
-            <a:r>
-              <a:t>• Mô hình học máy ALS tính toán theo Batch định kỳ, chưa cập nhật ma trận theo micro-giây.</a:t>
-            </a:r>
-          </a:p>
-        </p:txBody>
-      </p:sp>
-      <p:sp>
-        <p:nvSpPr>
-          <p:cNvPr id="11" name="Rounded Rectangle 10"/>
-          <p:cNvSpPr/>
-          <p:nvPr/>
-        </p:nvSpPr>
-        <p:spPr>
-          <a:xfrm>
-            <a:off x="8046720" y="1463040"/>
-            <a:ext cx="3566160" cy="4937760"/>
-          </a:xfrm>
-          <a:prstGeom prst="roundRect">
-            <a:avLst/>
-          </a:prstGeom>
-          <a:solidFill>
-            <a:srgbClr val="F5F8FC"/>
-          </a:solidFill>
-          <a:ln w="12700">
-            <a:solidFill>
-              <a:srgbClr val="BBDEFB"/>
-            </a:solidFill>
-          </a:ln>
-        </p:spPr>
-        <p:style>
-          <a:lnRef idx="1">
-            <a:schemeClr val="accent1"/>
-          </a:lnRef>
-          <a:fillRef idx="3">
-            <a:schemeClr val="accent1"/>
-          </a:fillRef>
-          <a:effectRef idx="2">
-            <a:schemeClr val="accent1"/>
-          </a:effectRef>
-          <a:fontRef idx="minor">
-            <a:schemeClr val="lt1"/>
-          </a:fontRef>
-        </p:style>
-        <p:txBody>
-          <a:bodyPr rtlCol="0" anchor="ctr"/>
-          <a:lstStyle/>
-          <a:p>
-            <a:pPr algn="ctr"/>
-          </a:p>
-        </p:txBody>
-      </p:sp>
-      <p:sp>
-        <p:nvSpPr>
-          <p:cNvPr id="12" name="Rectangle 11"/>
-          <p:cNvSpPr/>
-          <p:nvPr/>
-        </p:nvSpPr>
-        <p:spPr>
-          <a:xfrm>
-            <a:off x="8046720" y="1463040"/>
-            <a:ext cx="3566160" cy="64008"/>
-          </a:xfrm>
-          <a:prstGeom prst="rect">
-            <a:avLst/>
-          </a:prstGeom>
-          <a:solidFill>
-            <a:srgbClr val="1565C0"/>
-          </a:solidFill>
-          <a:ln>
-            <a:noFill/>
-          </a:ln>
-        </p:spPr>
-        <p:style>
-          <a:lnRef idx="1">
-            <a:schemeClr val="accent1"/>
-          </a:lnRef>
-          <a:fillRef idx="3">
-            <a:schemeClr val="accent1"/>
-          </a:fillRef>
-          <a:effectRef idx="2">
-            <a:schemeClr val="accent1"/>
-          </a:effectRef>
-          <a:fontRef idx="minor">
-            <a:schemeClr val="lt1"/>
-          </a:fontRef>
-        </p:style>
-        <p:txBody>
-          <a:bodyPr rtlCol="0" anchor="ctr"/>
-          <a:lstStyle/>
-          <a:p>
-            <a:pPr algn="ctr"/>
-          </a:p>
-        </p:txBody>
-      </p:sp>
-      <p:sp>
-        <p:nvSpPr>
-          <p:cNvPr id="13" name="TextBox 12"/>
-          <p:cNvSpPr txBox="1"/>
-          <p:nvPr/>
-        </p:nvSpPr>
-        <p:spPr>
-          <a:xfrm>
-            <a:off x="8183880" y="1572768"/>
-            <a:ext cx="3291840" cy="4773168"/>
-          </a:xfrm>
-          <a:prstGeom prst="rect">
-            <a:avLst/>
-          </a:prstGeom>
-          <a:noFill/>
-        </p:spPr>
-        <p:txBody>
-          <a:bodyPr wrap="square">
-            <a:spAutoFit/>
-          </a:bodyPr>
-          <a:lstStyle/>
-          <a:p>
-            <a:pPr>
-              <a:spcAft>
-                <a:spcPts val="400"/>
-              </a:spcAft>
-              <a:defRPr sz="1300" b="1">
-                <a:solidFill>
-                  <a:srgbClr val="1565C0"/>
-                </a:solidFill>
-              </a:defRPr>
-            </a:pPr>
-            <a:r>
-              <a:t>HƯỚNG MỞ RỘNG (SCALE-OUT)</a:t>
-            </a:r>
-          </a:p>
-          <a:p>
-            <a:pPr>
-              <a:spcAft>
-                <a:spcPts val="250"/>
-              </a:spcAft>
-              <a:defRPr sz="1100">
-                <a:solidFill>
-                  <a:srgbClr val="212529"/>
-                </a:solidFill>
-              </a:defRPr>
-            </a:pPr>
-            <a:r>
-              <a:t>• Mở rộng ngang: Triển khai trên nhiều máy chủ vật lý hoặc Cloud (AWS EMR / Dataproc).</a:t>
-            </a:r>
-          </a:p>
-          <a:p>
-            <a:pPr>
-              <a:spcAft>
-                <a:spcPts val="250"/>
-              </a:spcAft>
-              <a:defRPr sz="1100">
-                <a:solidFill>
-                  <a:srgbClr val="212529"/>
-                </a:solidFill>
-              </a:defRPr>
-            </a:pPr>
-            <a:r>
-              <a:t>• Xử lý thời gian thực: Tích hợp Apache Kafka và Spark Structured Streaming cập nhật gợi ý tức thời.</a:t>
-            </a:r>
-          </a:p>
-          <a:p>
-            <a:pPr>
-              <a:spcAft>
-                <a:spcPts val="250"/>
-              </a:spcAft>
-              <a:defRPr sz="1100">
-                <a:solidFill>
-                  <a:srgbClr val="212529"/>
-                </a:solidFill>
-              </a:defRPr>
-            </a:pPr>
-            <a:r>
-              <a:t>• Tích hợp Deep Learning: Neural Collaborative Filtering (NCF) tăng cường độ chính xác.</a:t>
+              <a:t>• Trường hợp 2 (Khách mới - Cold-Start): Tự động kích hoạt Fallback hiển thị Top sản phẩm Trending từ Spark SQL.</a:t>
             </a:r>
           </a:p>
         </p:txBody>
@@ -6807,7 +6554,647 @@
               </a:defRPr>
             </a:pPr>
             <a:r>
-              <a:t>PHẦN 6: KẾT LUẬN &amp; Q&amp;A (1 - 2 PHÚT)  |  Slide 15/15</a:t>
+              <a:t>PHẦN 6: KẾT LUẬN &amp; Q&amp;A (1 - 2 PHÚT)  |  Slide 15/16</a:t>
+            </a:r>
+          </a:p>
+        </p:txBody>
+      </p:sp>
+      <p:sp>
+        <p:nvSpPr>
+          <p:cNvPr id="4" name="TextBox 3"/>
+          <p:cNvSpPr txBox="1"/>
+          <p:nvPr/>
+        </p:nvSpPr>
+        <p:spPr>
+          <a:xfrm>
+            <a:off x="548640" y="868680"/>
+            <a:ext cx="11064240" cy="457200"/>
+          </a:xfrm>
+          <a:prstGeom prst="rect">
+            <a:avLst/>
+          </a:prstGeom>
+          <a:noFill/>
+        </p:spPr>
+        <p:txBody>
+          <a:bodyPr wrap="square">
+            <a:spAutoFit/>
+          </a:bodyPr>
+          <a:lstStyle/>
+          <a:p>
+            <a:pPr>
+              <a:defRPr sz="2000" b="1">
+                <a:solidFill>
+                  <a:srgbClr val="0D3B66"/>
+                </a:solidFill>
+              </a:defRPr>
+            </a:pPr>
+            <a:r>
+              <a:t>6.1. ĐÁNH GIÁ KẾT QUẢ, GIỚI HẠN &amp; HƯỚNG MỞ RỘNG</a:t>
+            </a:r>
+          </a:p>
+        </p:txBody>
+      </p:sp>
+      <p:sp>
+        <p:nvSpPr>
+          <p:cNvPr id="5" name="Rounded Rectangle 4"/>
+          <p:cNvSpPr/>
+          <p:nvPr/>
+        </p:nvSpPr>
+        <p:spPr>
+          <a:xfrm>
+            <a:off x="548640" y="1463040"/>
+            <a:ext cx="3566160" cy="4937760"/>
+          </a:xfrm>
+          <a:prstGeom prst="roundRect">
+            <a:avLst/>
+          </a:prstGeom>
+          <a:solidFill>
+            <a:srgbClr val="F5F8FC"/>
+          </a:solidFill>
+          <a:ln w="12700">
+            <a:solidFill>
+              <a:srgbClr val="BBDEFB"/>
+            </a:solidFill>
+          </a:ln>
+        </p:spPr>
+        <p:style>
+          <a:lnRef idx="1">
+            <a:schemeClr val="accent1"/>
+          </a:lnRef>
+          <a:fillRef idx="3">
+            <a:schemeClr val="accent1"/>
+          </a:fillRef>
+          <a:effectRef idx="2">
+            <a:schemeClr val="accent1"/>
+          </a:effectRef>
+          <a:fontRef idx="minor">
+            <a:schemeClr val="lt1"/>
+          </a:fontRef>
+        </p:style>
+        <p:txBody>
+          <a:bodyPr rtlCol="0" anchor="ctr"/>
+          <a:lstStyle/>
+          <a:p>
+            <a:pPr algn="ctr"/>
+          </a:p>
+        </p:txBody>
+      </p:sp>
+      <p:sp>
+        <p:nvSpPr>
+          <p:cNvPr id="6" name="Rectangle 5"/>
+          <p:cNvSpPr/>
+          <p:nvPr/>
+        </p:nvSpPr>
+        <p:spPr>
+          <a:xfrm>
+            <a:off x="548640" y="1463040"/>
+            <a:ext cx="3566160" cy="64008"/>
+          </a:xfrm>
+          <a:prstGeom prst="rect">
+            <a:avLst/>
+          </a:prstGeom>
+          <a:solidFill>
+            <a:srgbClr val="2E7D32"/>
+          </a:solidFill>
+          <a:ln>
+            <a:noFill/>
+          </a:ln>
+        </p:spPr>
+        <p:style>
+          <a:lnRef idx="1">
+            <a:schemeClr val="accent1"/>
+          </a:lnRef>
+          <a:fillRef idx="3">
+            <a:schemeClr val="accent1"/>
+          </a:fillRef>
+          <a:effectRef idx="2">
+            <a:schemeClr val="accent1"/>
+          </a:effectRef>
+          <a:fontRef idx="minor">
+            <a:schemeClr val="lt1"/>
+          </a:fontRef>
+        </p:style>
+        <p:txBody>
+          <a:bodyPr rtlCol="0" anchor="ctr"/>
+          <a:lstStyle/>
+          <a:p>
+            <a:pPr algn="ctr"/>
+          </a:p>
+        </p:txBody>
+      </p:sp>
+      <p:sp>
+        <p:nvSpPr>
+          <p:cNvPr id="7" name="TextBox 6"/>
+          <p:cNvSpPr txBox="1"/>
+          <p:nvPr/>
+        </p:nvSpPr>
+        <p:spPr>
+          <a:xfrm>
+            <a:off x="685800" y="1572768"/>
+            <a:ext cx="3291840" cy="4773168"/>
+          </a:xfrm>
+          <a:prstGeom prst="rect">
+            <a:avLst/>
+          </a:prstGeom>
+          <a:noFill/>
+        </p:spPr>
+        <p:txBody>
+          <a:bodyPr wrap="square">
+            <a:spAutoFit/>
+          </a:bodyPr>
+          <a:lstStyle/>
+          <a:p>
+            <a:pPr>
+              <a:spcAft>
+                <a:spcPts val="400"/>
+              </a:spcAft>
+              <a:defRPr sz="1300" b="1">
+                <a:solidFill>
+                  <a:srgbClr val="2E7D32"/>
+                </a:solidFill>
+              </a:defRPr>
+            </a:pPr>
+            <a:r>
+              <a:t>NHỮNG GÌ ĐÃ LÀM ĐƯỢC</a:t>
+            </a:r>
+          </a:p>
+          <a:p>
+            <a:pPr>
+              <a:spcAft>
+                <a:spcPts val="250"/>
+              </a:spcAft>
+              <a:defRPr sz="1100">
+                <a:solidFill>
+                  <a:srgbClr val="212529"/>
+                </a:solidFill>
+              </a:defRPr>
+            </a:pPr>
+            <a:r>
+              <a:t>• Hoàn chỉnh cụm Docker Hadoop HDFS (2 DataNodes) &amp; Spark (2 Workers).</a:t>
+            </a:r>
+          </a:p>
+          <a:p>
+            <a:pPr>
+              <a:spcAft>
+                <a:spcPts val="250"/>
+              </a:spcAft>
+              <a:defRPr sz="1100">
+                <a:solidFill>
+                  <a:srgbClr val="212529"/>
+                </a:solidFill>
+              </a:defRPr>
+            </a:pPr>
+            <a:r>
+              <a:t>• Xử lý 2.75M dòng log; Parquet giảm 94.9% dung lượng, tăng tốc đọc 13.2 lần.</a:t>
+            </a:r>
+          </a:p>
+          <a:p>
+            <a:pPr>
+              <a:spcAft>
+                <a:spcPts val="250"/>
+              </a:spcAft>
+              <a:defRPr sz="1100">
+                <a:solidFill>
+                  <a:srgbClr val="212529"/>
+                </a:solidFill>
+              </a:defRPr>
+            </a:pPr>
+            <a:r>
+              <a:t>• Mô hình ALS đạt RMSE ~ 0.021 (+75.2% vs Baseline), khắc phục Cold-Start.</a:t>
+            </a:r>
+          </a:p>
+          <a:p>
+            <a:pPr>
+              <a:spcAft>
+                <a:spcPts val="250"/>
+              </a:spcAft>
+              <a:defRPr sz="1100">
+                <a:solidFill>
+                  <a:srgbClr val="212529"/>
+                </a:solidFill>
+              </a:defRPr>
+            </a:pPr>
+            <a:r>
+              <a:t>• Tự động hóa bằng Airflow DAG (5/5 tasks SUCCESS), truyền nhận streaming với Kafka.</a:t>
+            </a:r>
+          </a:p>
+        </p:txBody>
+      </p:sp>
+      <p:sp>
+        <p:nvSpPr>
+          <p:cNvPr id="8" name="Rounded Rectangle 7"/>
+          <p:cNvSpPr/>
+          <p:nvPr/>
+        </p:nvSpPr>
+        <p:spPr>
+          <a:xfrm>
+            <a:off x="4297680" y="1463040"/>
+            <a:ext cx="3566160" cy="4937760"/>
+          </a:xfrm>
+          <a:prstGeom prst="roundRect">
+            <a:avLst/>
+          </a:prstGeom>
+          <a:solidFill>
+            <a:srgbClr val="F5F8FC"/>
+          </a:solidFill>
+          <a:ln w="12700">
+            <a:solidFill>
+              <a:srgbClr val="BBDEFB"/>
+            </a:solidFill>
+          </a:ln>
+        </p:spPr>
+        <p:style>
+          <a:lnRef idx="1">
+            <a:schemeClr val="accent1"/>
+          </a:lnRef>
+          <a:fillRef idx="3">
+            <a:schemeClr val="accent1"/>
+          </a:fillRef>
+          <a:effectRef idx="2">
+            <a:schemeClr val="accent1"/>
+          </a:effectRef>
+          <a:fontRef idx="minor">
+            <a:schemeClr val="lt1"/>
+          </a:fontRef>
+        </p:style>
+        <p:txBody>
+          <a:bodyPr rtlCol="0" anchor="ctr"/>
+          <a:lstStyle/>
+          <a:p>
+            <a:pPr algn="ctr"/>
+          </a:p>
+        </p:txBody>
+      </p:sp>
+      <p:sp>
+        <p:nvSpPr>
+          <p:cNvPr id="9" name="Rectangle 8"/>
+          <p:cNvSpPr/>
+          <p:nvPr/>
+        </p:nvSpPr>
+        <p:spPr>
+          <a:xfrm>
+            <a:off x="4297680" y="1463040"/>
+            <a:ext cx="3566160" cy="64008"/>
+          </a:xfrm>
+          <a:prstGeom prst="rect">
+            <a:avLst/>
+          </a:prstGeom>
+          <a:solidFill>
+            <a:srgbClr val="E65100"/>
+          </a:solidFill>
+          <a:ln>
+            <a:noFill/>
+          </a:ln>
+        </p:spPr>
+        <p:style>
+          <a:lnRef idx="1">
+            <a:schemeClr val="accent1"/>
+          </a:lnRef>
+          <a:fillRef idx="3">
+            <a:schemeClr val="accent1"/>
+          </a:fillRef>
+          <a:effectRef idx="2">
+            <a:schemeClr val="accent1"/>
+          </a:effectRef>
+          <a:fontRef idx="minor">
+            <a:schemeClr val="lt1"/>
+          </a:fontRef>
+        </p:style>
+        <p:txBody>
+          <a:bodyPr rtlCol="0" anchor="ctr"/>
+          <a:lstStyle/>
+          <a:p>
+            <a:pPr algn="ctr"/>
+          </a:p>
+        </p:txBody>
+      </p:sp>
+      <p:sp>
+        <p:nvSpPr>
+          <p:cNvPr id="10" name="TextBox 9"/>
+          <p:cNvSpPr txBox="1"/>
+          <p:nvPr/>
+        </p:nvSpPr>
+        <p:spPr>
+          <a:xfrm>
+            <a:off x="4434840" y="1572768"/>
+            <a:ext cx="3291840" cy="4773168"/>
+          </a:xfrm>
+          <a:prstGeom prst="rect">
+            <a:avLst/>
+          </a:prstGeom>
+          <a:noFill/>
+        </p:spPr>
+        <p:txBody>
+          <a:bodyPr wrap="square">
+            <a:spAutoFit/>
+          </a:bodyPr>
+          <a:lstStyle/>
+          <a:p>
+            <a:pPr>
+              <a:spcAft>
+                <a:spcPts val="400"/>
+              </a:spcAft>
+              <a:defRPr sz="1300" b="1">
+                <a:solidFill>
+                  <a:srgbClr val="E65100"/>
+                </a:solidFill>
+              </a:defRPr>
+            </a:pPr>
+            <a:r>
+              <a:t>GIỚI HẠN PHẦN CỨNG</a:t>
+            </a:r>
+          </a:p>
+          <a:p>
+            <a:pPr>
+              <a:spcAft>
+                <a:spcPts val="250"/>
+              </a:spcAft>
+              <a:defRPr sz="1100">
+                <a:solidFill>
+                  <a:srgbClr val="212529"/>
+                </a:solidFill>
+              </a:defRPr>
+            </a:pPr>
+            <a:r>
+              <a:t>• Containers chạy ảo hóa trên 1 máy cá nhân duy nhất (chia sẻ CPU và RAM).</a:t>
+            </a:r>
+          </a:p>
+          <a:p>
+            <a:pPr>
+              <a:spcAft>
+                <a:spcPts val="250"/>
+              </a:spcAft>
+              <a:defRPr sz="1100">
+                <a:solidFill>
+                  <a:srgbClr val="212529"/>
+                </a:solidFill>
+              </a:defRPr>
+            </a:pPr>
+            <a:r>
+              <a:t>• Dung lượng RAM cấp phát cho Spark Worker (6.7 GiB) giới hạn khi mở rộng dữ liệu lớn hơn.</a:t>
+            </a:r>
+          </a:p>
+          <a:p>
+            <a:pPr>
+              <a:spcAft>
+                <a:spcPts val="250"/>
+              </a:spcAft>
+              <a:defRPr sz="1100">
+                <a:solidFill>
+                  <a:srgbClr val="212529"/>
+                </a:solidFill>
+              </a:defRPr>
+            </a:pPr>
+            <a:r>
+              <a:t>• Mô hình học máy ALS tính toán theo Batch định kỳ, chưa cập nhật ma trận theo micro-giây.</a:t>
+            </a:r>
+          </a:p>
+        </p:txBody>
+      </p:sp>
+      <p:sp>
+        <p:nvSpPr>
+          <p:cNvPr id="11" name="Rounded Rectangle 10"/>
+          <p:cNvSpPr/>
+          <p:nvPr/>
+        </p:nvSpPr>
+        <p:spPr>
+          <a:xfrm>
+            <a:off x="8046720" y="1463040"/>
+            <a:ext cx="3566160" cy="4937760"/>
+          </a:xfrm>
+          <a:prstGeom prst="roundRect">
+            <a:avLst/>
+          </a:prstGeom>
+          <a:solidFill>
+            <a:srgbClr val="F5F8FC"/>
+          </a:solidFill>
+          <a:ln w="12700">
+            <a:solidFill>
+              <a:srgbClr val="BBDEFB"/>
+            </a:solidFill>
+          </a:ln>
+        </p:spPr>
+        <p:style>
+          <a:lnRef idx="1">
+            <a:schemeClr val="accent1"/>
+          </a:lnRef>
+          <a:fillRef idx="3">
+            <a:schemeClr val="accent1"/>
+          </a:fillRef>
+          <a:effectRef idx="2">
+            <a:schemeClr val="accent1"/>
+          </a:effectRef>
+          <a:fontRef idx="minor">
+            <a:schemeClr val="lt1"/>
+          </a:fontRef>
+        </p:style>
+        <p:txBody>
+          <a:bodyPr rtlCol="0" anchor="ctr"/>
+          <a:lstStyle/>
+          <a:p>
+            <a:pPr algn="ctr"/>
+          </a:p>
+        </p:txBody>
+      </p:sp>
+      <p:sp>
+        <p:nvSpPr>
+          <p:cNvPr id="12" name="Rectangle 11"/>
+          <p:cNvSpPr/>
+          <p:nvPr/>
+        </p:nvSpPr>
+        <p:spPr>
+          <a:xfrm>
+            <a:off x="8046720" y="1463040"/>
+            <a:ext cx="3566160" cy="64008"/>
+          </a:xfrm>
+          <a:prstGeom prst="rect">
+            <a:avLst/>
+          </a:prstGeom>
+          <a:solidFill>
+            <a:srgbClr val="1565C0"/>
+          </a:solidFill>
+          <a:ln>
+            <a:noFill/>
+          </a:ln>
+        </p:spPr>
+        <p:style>
+          <a:lnRef idx="1">
+            <a:schemeClr val="accent1"/>
+          </a:lnRef>
+          <a:fillRef idx="3">
+            <a:schemeClr val="accent1"/>
+          </a:fillRef>
+          <a:effectRef idx="2">
+            <a:schemeClr val="accent1"/>
+          </a:effectRef>
+          <a:fontRef idx="minor">
+            <a:schemeClr val="lt1"/>
+          </a:fontRef>
+        </p:style>
+        <p:txBody>
+          <a:bodyPr rtlCol="0" anchor="ctr"/>
+          <a:lstStyle/>
+          <a:p>
+            <a:pPr algn="ctr"/>
+          </a:p>
+        </p:txBody>
+      </p:sp>
+      <p:sp>
+        <p:nvSpPr>
+          <p:cNvPr id="13" name="TextBox 12"/>
+          <p:cNvSpPr txBox="1"/>
+          <p:nvPr/>
+        </p:nvSpPr>
+        <p:spPr>
+          <a:xfrm>
+            <a:off x="8183880" y="1572768"/>
+            <a:ext cx="3291840" cy="4773168"/>
+          </a:xfrm>
+          <a:prstGeom prst="rect">
+            <a:avLst/>
+          </a:prstGeom>
+          <a:noFill/>
+        </p:spPr>
+        <p:txBody>
+          <a:bodyPr wrap="square">
+            <a:spAutoFit/>
+          </a:bodyPr>
+          <a:lstStyle/>
+          <a:p>
+            <a:pPr>
+              <a:spcAft>
+                <a:spcPts val="400"/>
+              </a:spcAft>
+              <a:defRPr sz="1300" b="1">
+                <a:solidFill>
+                  <a:srgbClr val="1565C0"/>
+                </a:solidFill>
+              </a:defRPr>
+            </a:pPr>
+            <a:r>
+              <a:t>HƯỚNG MỞ RỘNG (SCALE-OUT)</a:t>
+            </a:r>
+          </a:p>
+          <a:p>
+            <a:pPr>
+              <a:spcAft>
+                <a:spcPts val="250"/>
+              </a:spcAft>
+              <a:defRPr sz="1100">
+                <a:solidFill>
+                  <a:srgbClr val="212529"/>
+                </a:solidFill>
+              </a:defRPr>
+            </a:pPr>
+            <a:r>
+              <a:t>• Mở rộng ngang: Triển khai trên nhiều máy chủ vật lý hoặc Cloud (AWS EMR / Dataproc).</a:t>
+            </a:r>
+          </a:p>
+          <a:p>
+            <a:pPr>
+              <a:spcAft>
+                <a:spcPts val="250"/>
+              </a:spcAft>
+              <a:defRPr sz="1100">
+                <a:solidFill>
+                  <a:srgbClr val="212529"/>
+                </a:solidFill>
+              </a:defRPr>
+            </a:pPr>
+            <a:r>
+              <a:t>• Xử lý thời gian thực: Tích hợp Apache Kafka và Spark Structured Streaming cập nhật gợi ý tức thời.</a:t>
+            </a:r>
+          </a:p>
+          <a:p>
+            <a:pPr>
+              <a:spcAft>
+                <a:spcPts val="250"/>
+              </a:spcAft>
+              <a:defRPr sz="1100">
+                <a:solidFill>
+                  <a:srgbClr val="212529"/>
+                </a:solidFill>
+              </a:defRPr>
+            </a:pPr>
+            <a:r>
+              <a:t>• Tích hợp Deep Learning: Neural Collaborative Filtering (NCF) tăng cường độ chính xác.</a:t>
+            </a:r>
+          </a:p>
+        </p:txBody>
+      </p:sp>
+    </p:spTree>
+  </p:cSld>
+  <p:clrMapOvr>
+    <a:masterClrMapping/>
+  </p:clrMapOvr>
+</p:sld>
+</file>
+
+<file path=ppt/slides/slide16.xml><?xml version="1.0" encoding="utf-8"?>
+<p:sld xmlns:a="http://schemas.openxmlformats.org/drawingml/2006/main" xmlns:p="http://schemas.openxmlformats.org/presentationml/2006/main" xmlns:r="http://schemas.openxmlformats.org/officeDocument/2006/relationships">
+  <p:cSld>
+    <p:spTree>
+      <p:nvGrpSpPr>
+        <p:cNvPr id="1" name=""/>
+        <p:cNvGrpSpPr/>
+        <p:nvPr/>
+      </p:nvGrpSpPr>
+      <p:grpSpPr/>
+      <p:pic>
+        <p:nvPicPr>
+          <p:cNvPr id="2" name="Picture 1" descr="custom_bg.png"/>
+          <p:cNvPicPr>
+            <a:picLocks noChangeAspect="1"/>
+          </p:cNvPicPr>
+          <p:nvPr/>
+        </p:nvPicPr>
+        <p:blipFill>
+          <a:blip r:embed="rId2"/>
+          <a:stretch>
+            <a:fillRect/>
+          </a:stretch>
+        </p:blipFill>
+        <p:spPr>
+          <a:xfrm>
+            <a:off x="0" y="0"/>
+            <a:ext cx="12191695" cy="6858000"/>
+          </a:xfrm>
+          <a:prstGeom prst="rect">
+            <a:avLst/>
+          </a:prstGeom>
+        </p:spPr>
+      </p:pic>
+      <p:sp>
+        <p:nvSpPr>
+          <p:cNvPr id="3" name="TextBox 2"/>
+          <p:cNvSpPr txBox="1"/>
+          <p:nvPr/>
+        </p:nvSpPr>
+        <p:spPr>
+          <a:xfrm>
+            <a:off x="5669280" y="164592"/>
+            <a:ext cx="6035040" cy="365760"/>
+          </a:xfrm>
+          <a:prstGeom prst="rect">
+            <a:avLst/>
+          </a:prstGeom>
+          <a:noFill/>
+        </p:spPr>
+        <p:txBody>
+          <a:bodyPr wrap="square">
+            <a:spAutoFit/>
+          </a:bodyPr>
+          <a:lstStyle/>
+          <a:p>
+            <a:pPr algn="r">
+              <a:defRPr sz="1100" b="1">
+                <a:solidFill>
+                  <a:srgbClr val="FFFFFF"/>
+                </a:solidFill>
+              </a:defRPr>
+            </a:pPr>
+            <a:r>
+              <a:t>PHẦN 6: KẾT LUẬN &amp; Q&amp;A (1 - 2 PHÚT)  |  Slide 16/16</a:t>
             </a:r>
           </a:p>
         </p:txBody>
@@ -7152,7 +7539,7 @@
               </a:defRPr>
             </a:pPr>
             <a:r>
-              <a:t>PHẦN 1: ĐẶT VẤN ĐỀ (1 - 2 PHÚT)  |  Slide 2/15</a:t>
+              <a:t>PHẦN 1: ĐẶT VẤN ĐỀ (1 - 2 PHÚT)  |  Slide 2/16</a:t>
             </a:r>
           </a:p>
         </p:txBody>
@@ -7792,7 +8179,7 @@
               </a:defRPr>
             </a:pPr>
             <a:r>
-              <a:t>PHẦN 2: GIỚI THIỆU DATASET (2 - 3 PHÚT)  |  Slide 3/15</a:t>
+              <a:t>PHẦN 2: GIỚI THIỆU DATASET (2 - 3 PHÚT)  |  Slide 3/16</a:t>
             </a:r>
           </a:p>
         </p:txBody>
@@ -8573,7 +8960,7 @@
               </a:defRPr>
             </a:pPr>
             <a:r>
-              <a:t>PHẦN 2: GIỚI THIỆU DATASET (2 - 3 PHÚT)  |  Slide 4/15</a:t>
+              <a:t>PHẦN 2: GIỚI THIỆU DATASET (2 - 3 PHÚT)  |  Slide 4/16</a:t>
             </a:r>
           </a:p>
         </p:txBody>
@@ -9131,7 +9518,7 @@
               </a:defRPr>
             </a:pPr>
             <a:r>
-              <a:t>PHẦN 2: GIỚI THIỆU DATASET (2 - 3 PHÚT)  |  Slide 5/15</a:t>
+              <a:t>PHẦN 2: GIỚI THIỆU DATASET (2 - 3 PHÚT)  |  Slide 5/16</a:t>
             </a:r>
           </a:p>
         </p:txBody>
@@ -10345,7 +10732,7 @@
               </a:defRPr>
             </a:pPr>
             <a:r>
-              <a:t>PHẦN 3: KIẾN TRÚC HỆ THỐNG (2 - 3 PHÚT)  |  Slide 6/15</a:t>
+              <a:t>PHẦN 3: KIẾN TRÚC HỆ THỐNG (2 - 3 PHÚT)  |  Slide 6/16</a:t>
             </a:r>
           </a:p>
         </p:txBody>
@@ -10380,7 +10767,7 @@
               </a:defRPr>
             </a:pPr>
             <a:r>
-              <a:t>3.1. SƠ ĐỒ PIPELINE &amp; ĐIỀU PHỐI AIRFLOW DAG (5 BƯỚC KHÉP KÍN)</a:t>
+              <a:t>3.1. THU THẬP &amp; TRUYỀN DỮ LIỆU STREAMING VỚI APACHE KAFKA</a:t>
             </a:r>
           </a:p>
         </p:txBody>
@@ -10393,8 +10780,8 @@
         </p:nvSpPr>
         <p:spPr>
           <a:xfrm>
-            <a:off x="457200" y="1463040"/>
-            <a:ext cx="2148840" cy="4937760"/>
+            <a:off x="548640" y="1463040"/>
+            <a:ext cx="3566160" cy="3291840"/>
           </a:xfrm>
           <a:prstGeom prst="roundRect">
             <a:avLst/>
@@ -10438,8 +10825,8 @@
         </p:nvSpPr>
         <p:spPr>
           <a:xfrm>
-            <a:off x="457200" y="1463040"/>
-            <a:ext cx="2148840" cy="64008"/>
+            <a:off x="548640" y="1463040"/>
+            <a:ext cx="3566160" cy="64008"/>
           </a:xfrm>
           <a:prstGeom prst="rect">
             <a:avLst/>
@@ -10481,8 +10868,8 @@
         </p:nvSpPr>
         <p:spPr>
           <a:xfrm>
-            <a:off x="594360" y="1572768"/>
-            <a:ext cx="1874520" cy="4773168"/>
+            <a:off x="685800" y="1572768"/>
+            <a:ext cx="3291840" cy="3127248"/>
           </a:xfrm>
           <a:prstGeom prst="rect">
             <a:avLst/>
@@ -10506,7 +10893,7 @@
               </a:defRPr>
             </a:pPr>
             <a:r>
-              <a:t>BƯỚC 1: INGESTION</a:t>
+              <a:t>1. KAFKA PRODUCER (CLICKSTREAM)</a:t>
             </a:r>
           </a:p>
           <a:p>
@@ -10521,7 +10908,7 @@
               </a:defRPr>
             </a:pPr>
             <a:r>
-              <a:t>• Script: 00_init_hdfs.sh</a:t>
+              <a:t>• File: scripts/kafka_clickstream_producer.py</a:t>
             </a:r>
           </a:p>
           <a:p>
@@ -10536,7 +10923,7 @@
               </a:defRPr>
             </a:pPr>
             <a:r>
-              <a:t>• Đẩy 1.4 GB events.csv lên HDFS (/data/raw).</a:t>
+              <a:t>• Giả lập luồng sự kiện clickstream theo thời gian thực từ events.csv.</a:t>
             </a:r>
           </a:p>
           <a:p>
@@ -10551,7 +10938,7 @@
               </a:defRPr>
             </a:pPr>
             <a:r>
-              <a:t>• 12 Blocks (128MB), Rep=2.</a:t>
+              <a:t>• Payload JSON chuẩn: {timestamp, visitorid, event, itemid, transactionid}.</a:t>
             </a:r>
           </a:p>
           <a:p>
@@ -10566,7 +10953,22 @@
               </a:defRPr>
             </a:pPr>
             <a:r>
-              <a:t>• Mở rộng: Kafka Streaming (Producer &amp; Consumer).</a:t>
+              <a:t>• Tốc độ phát linh hoạt: 50 - 100 events/giây qua cổng 9092.</a:t>
+            </a:r>
+          </a:p>
+          <a:p>
+            <a:pPr>
+              <a:spcAft>
+                <a:spcPts val="250"/>
+              </a:spcAft>
+              <a:defRPr sz="1100">
+                <a:solidFill>
+                  <a:srgbClr val="212529"/>
+                </a:solidFill>
+              </a:defRPr>
+            </a:pPr>
+            <a:r>
+              <a:t>• Chế độ mô phỏng độc lập (Standalone simulation) khi không có cụm.</a:t>
             </a:r>
           </a:p>
         </p:txBody>
@@ -10579,8 +10981,8 @@
         </p:nvSpPr>
         <p:spPr>
           <a:xfrm>
-            <a:off x="2724912" y="1463040"/>
-            <a:ext cx="2148840" cy="4937760"/>
+            <a:off x="4297680" y="1463040"/>
+            <a:ext cx="3566160" cy="3291840"/>
           </a:xfrm>
           <a:prstGeom prst="roundRect">
             <a:avLst/>
@@ -10624,8 +11026,8 @@
         </p:nvSpPr>
         <p:spPr>
           <a:xfrm>
-            <a:off x="2724912" y="1463040"/>
-            <a:ext cx="2148840" cy="64008"/>
+            <a:off x="4297680" y="1463040"/>
+            <a:ext cx="3566160" cy="64008"/>
           </a:xfrm>
           <a:prstGeom prst="rect">
             <a:avLst/>
@@ -10667,8 +11069,8 @@
         </p:nvSpPr>
         <p:spPr>
           <a:xfrm>
-            <a:off x="2862072" y="1572768"/>
-            <a:ext cx="1874520" cy="4773168"/>
+            <a:off x="4434840" y="1572768"/>
+            <a:ext cx="3291840" cy="3127248"/>
           </a:xfrm>
           <a:prstGeom prst="rect">
             <a:avLst/>
@@ -10692,7 +11094,7 @@
               </a:defRPr>
             </a:pPr>
             <a:r>
-              <a:t>BƯỚC 2: SPARK ETL</a:t>
+              <a:t>2. KAFKA BROKER &amp; TOPIC</a:t>
             </a:r>
           </a:p>
           <a:p>
@@ -10707,7 +11109,7 @@
               </a:defRPr>
             </a:pPr>
             <a:r>
-              <a:t>• Script: 01_etl.py</a:t>
+              <a:t>• Topic đăng ký: 'ecommerce_clickstream' (Port 9092).</a:t>
             </a:r>
           </a:p>
           <a:p>
@@ -10722,7 +11124,7 @@
               </a:defRPr>
             </a:pPr>
             <a:r>
-              <a:t>• Đọc CSV phân tán từ HDFS.</a:t>
+              <a:t>• Đồng bộ metadata cụm phân tán qua Apache Zookeeper (Port 2181).</a:t>
             </a:r>
           </a:p>
           <a:p>
@@ -10737,7 +11139,7 @@
               </a:defRPr>
             </a:pPr>
             <a:r>
-              <a:t>• Làm sạch dropna, dropDuplicates.</a:t>
+              <a:t>• Bộ đệm Message Queue chịu tải cao, triệt tiêu nghẽn cổ chai I/O.</a:t>
             </a:r>
           </a:p>
           <a:p>
@@ -10752,7 +11154,7 @@
               </a:defRPr>
             </a:pPr>
             <a:r>
-              <a:t>• Gán điểm View=1, Cart=2, Buy=3.</a:t>
+              <a:t>• Hỗ trợ phân vùng Partition mở rộng ngang (Horizontal Scale) theo cụm.</a:t>
             </a:r>
           </a:p>
           <a:p>
@@ -10767,7 +11169,7 @@
               </a:defRPr>
             </a:pPr>
             <a:r>
-              <a:t>• Lưu Parquet nén Snappy (72MB).</a:t>
+              <a:t>• Bảo đảm độ tin cậy truyền tin (At-least-once delivery, Zero Data Loss).</a:t>
             </a:r>
           </a:p>
         </p:txBody>
@@ -10780,8 +11182,8 @@
         </p:nvSpPr>
         <p:spPr>
           <a:xfrm>
-            <a:off x="4992624" y="1463040"/>
-            <a:ext cx="2148840" cy="4937760"/>
+            <a:off x="8046720" y="1463040"/>
+            <a:ext cx="3566160" cy="3291840"/>
           </a:xfrm>
           <a:prstGeom prst="roundRect">
             <a:avLst/>
@@ -10825,8 +11227,8 @@
         </p:nvSpPr>
         <p:spPr>
           <a:xfrm>
-            <a:off x="4992624" y="1463040"/>
-            <a:ext cx="2148840" cy="64008"/>
+            <a:off x="8046720" y="1463040"/>
+            <a:ext cx="3566160" cy="64008"/>
           </a:xfrm>
           <a:prstGeom prst="rect">
             <a:avLst/>
@@ -10868,8 +11270,8 @@
         </p:nvSpPr>
         <p:spPr>
           <a:xfrm>
-            <a:off x="5129784" y="1572768"/>
-            <a:ext cx="1874520" cy="4773168"/>
+            <a:off x="8183880" y="1572768"/>
+            <a:ext cx="3291840" cy="3127248"/>
           </a:xfrm>
           <a:prstGeom prst="rect">
             <a:avLst/>
@@ -10893,7 +11295,7 @@
               </a:defRPr>
             </a:pPr>
             <a:r>
-              <a:t>BƯỚC 3: SPARK SQL</a:t>
+              <a:t>3. KAFKA CONSUMER &amp; HDFS SINK</a:t>
             </a:r>
           </a:p>
           <a:p>
@@ -10908,7 +11310,7 @@
               </a:defRPr>
             </a:pPr>
             <a:r>
-              <a:t>• Script: 01b_spark_sql.py</a:t>
+              <a:t>• File: scripts/kafka_hdfs_consumer.py</a:t>
             </a:r>
           </a:p>
           <a:p>
@@ -10923,7 +11325,7 @@
               </a:defRPr>
             </a:pPr>
             <a:r>
-              <a:t>• Tạo bảng tạm events_table.</a:t>
+              <a:t>• Lắng nghe liên tục luồng sự kiện từ topic ecommerce_clickstream.</a:t>
             </a:r>
           </a:p>
           <a:p>
@@ -10938,7 +11340,7 @@
               </a:defRPr>
             </a:pPr>
             <a:r>
-              <a:t>• Catalyst Optimizer tìm Top 10 SP tương tác cao nhất.</a:t>
+              <a:t>• Cơ chế Micro-Batching: Tự động gom 50 events/mẻ (hoặc timeout 5s).</a:t>
             </a:r>
           </a:p>
           <a:p>
@@ -10953,7 +11355,22 @@
               </a:defRPr>
             </a:pPr>
             <a:r>
-              <a:t>• Giải quyết triệt để Cold-Start.</a:t>
+              <a:t>• Ghi trực tiếp tệp JSON mẻ xuống phân hệ phân tán Hadoop HDFS: /data/streaming/events_batch_&lt;timestamp&gt;.json.</a:t>
+            </a:r>
+          </a:p>
+          <a:p>
+            <a:pPr>
+              <a:spcAft>
+                <a:spcPts val="250"/>
+              </a:spcAft>
+              <a:defRPr sz="1100">
+                <a:solidFill>
+                  <a:srgbClr val="212529"/>
+                </a:solidFill>
+              </a:defRPr>
+            </a:pPr>
+            <a:r>
+              <a:t>• Hình thành kho dữ liệu thô (Raw Data Lake) phục vụ Spark ETL xử lý.</a:t>
             </a:r>
           </a:p>
         </p:txBody>
@@ -10966,8 +11383,8 @@
         </p:nvSpPr>
         <p:spPr>
           <a:xfrm>
-            <a:off x="7260336" y="1463040"/>
-            <a:ext cx="2148840" cy="4937760"/>
+            <a:off x="548640" y="4892040"/>
+            <a:ext cx="11064240" cy="1554480"/>
           </a:xfrm>
           <a:prstGeom prst="roundRect">
             <a:avLst/>
@@ -11011,8 +11428,8 @@
         </p:nvSpPr>
         <p:spPr>
           <a:xfrm>
-            <a:off x="7260336" y="1463040"/>
-            <a:ext cx="2148840" cy="64008"/>
+            <a:off x="548640" y="4892040"/>
+            <a:ext cx="11064240" cy="64008"/>
           </a:xfrm>
           <a:prstGeom prst="rect">
             <a:avLst/>
@@ -11054,8 +11471,8 @@
         </p:nvSpPr>
         <p:spPr>
           <a:xfrm>
-            <a:off x="7397496" y="1572768"/>
-            <a:ext cx="1874520" cy="4773168"/>
+            <a:off x="685800" y="5001768"/>
+            <a:ext cx="10789919" cy="1389888"/>
           </a:xfrm>
           <a:prstGeom prst="rect">
             <a:avLst/>
@@ -11079,7 +11496,7 @@
               </a:defRPr>
             </a:pPr>
             <a:r>
-              <a:t>BƯỚC 4: SPARK MLLIB</a:t>
+              <a:t>MINH CHỨNG THỰC NGHIỆM ĐÃ TRIỂN KHAI THÀNH CÔNG (LOGS/06_KAFKA_STREAMING.LOG)</a:t>
             </a:r>
           </a:p>
           <a:p>
@@ -11094,7 +11511,7 @@
               </a:defRPr>
             </a:pPr>
             <a:r>
-              <a:t>• Script: 02_train_als.py</a:t>
+              <a:t>• Đã thực nghiệm phát sinh và thu nạp thành công 200 clickstream events vào topic 'ecommerce_clickstream'.</a:t>
             </a:r>
           </a:p>
           <a:p>
@@ -11109,7 +11526,7 @@
               </a:defRPr>
             </a:pPr>
             <a:r>
-              <a:t>• Đọc Parquet nén Snappy.</a:t>
+              <a:t>• Consumer tiếp nhận và phân mẻ thành 4 micro-batches sink xuống HDFS an toàn (100% Success, 0% thất thoát dữ liệu).</a:t>
             </a:r>
           </a:p>
           <a:p>
@@ -11124,208 +11541,7 @@
               </a:defRPr>
             </a:pPr>
             <a:r>
-              <a:t>• Huấn luyện Implicit ALS 10 vòng.</a:t>
-            </a:r>
-          </a:p>
-          <a:p>
-            <a:pPr>
-              <a:spcAft>
-                <a:spcPts val="250"/>
-              </a:spcAft>
-              <a:defRPr sz="1100">
-                <a:solidFill>
-                  <a:srgbClr val="212529"/>
-                </a:solidFill>
-              </a:defRPr>
-            </a:pPr>
-            <a:r>
-              <a:t>• Hội tụ RMSE ~ 0.02108, lưu model vào /spark/models.</a:t>
-            </a:r>
-          </a:p>
-        </p:txBody>
-      </p:sp>
-      <p:sp>
-        <p:nvSpPr>
-          <p:cNvPr id="17" name="Rounded Rectangle 16"/>
-          <p:cNvSpPr/>
-          <p:nvPr/>
-        </p:nvSpPr>
-        <p:spPr>
-          <a:xfrm>
-            <a:off x="9528048" y="1463040"/>
-            <a:ext cx="2148840" cy="4937760"/>
-          </a:xfrm>
-          <a:prstGeom prst="roundRect">
-            <a:avLst/>
-          </a:prstGeom>
-          <a:solidFill>
-            <a:srgbClr val="F5F8FC"/>
-          </a:solidFill>
-          <a:ln w="12700">
-            <a:solidFill>
-              <a:srgbClr val="BBDEFB"/>
-            </a:solidFill>
-          </a:ln>
-        </p:spPr>
-        <p:style>
-          <a:lnRef idx="1">
-            <a:schemeClr val="accent1"/>
-          </a:lnRef>
-          <a:fillRef idx="3">
-            <a:schemeClr val="accent1"/>
-          </a:fillRef>
-          <a:effectRef idx="2">
-            <a:schemeClr val="accent1"/>
-          </a:effectRef>
-          <a:fontRef idx="minor">
-            <a:schemeClr val="lt1"/>
-          </a:fontRef>
-        </p:style>
-        <p:txBody>
-          <a:bodyPr rtlCol="0" anchor="ctr"/>
-          <a:lstStyle/>
-          <a:p>
-            <a:pPr algn="ctr"/>
-          </a:p>
-        </p:txBody>
-      </p:sp>
-      <p:sp>
-        <p:nvSpPr>
-          <p:cNvPr id="18" name="Rectangle 17"/>
-          <p:cNvSpPr/>
-          <p:nvPr/>
-        </p:nvSpPr>
-        <p:spPr>
-          <a:xfrm>
-            <a:off x="9528048" y="1463040"/>
-            <a:ext cx="2148840" cy="64008"/>
-          </a:xfrm>
-          <a:prstGeom prst="rect">
-            <a:avLst/>
-          </a:prstGeom>
-          <a:solidFill>
-            <a:srgbClr val="0D3B66"/>
-          </a:solidFill>
-          <a:ln>
-            <a:noFill/>
-          </a:ln>
-        </p:spPr>
-        <p:style>
-          <a:lnRef idx="1">
-            <a:schemeClr val="accent1"/>
-          </a:lnRef>
-          <a:fillRef idx="3">
-            <a:schemeClr val="accent1"/>
-          </a:fillRef>
-          <a:effectRef idx="2">
-            <a:schemeClr val="accent1"/>
-          </a:effectRef>
-          <a:fontRef idx="minor">
-            <a:schemeClr val="lt1"/>
-          </a:fontRef>
-        </p:style>
-        <p:txBody>
-          <a:bodyPr rtlCol="0" anchor="ctr"/>
-          <a:lstStyle/>
-          <a:p>
-            <a:pPr algn="ctr"/>
-          </a:p>
-        </p:txBody>
-      </p:sp>
-      <p:sp>
-        <p:nvSpPr>
-          <p:cNvPr id="19" name="TextBox 18"/>
-          <p:cNvSpPr txBox="1"/>
-          <p:nvPr/>
-        </p:nvSpPr>
-        <p:spPr>
-          <a:xfrm>
-            <a:off x="9665208" y="1572768"/>
-            <a:ext cx="1874520" cy="4773168"/>
-          </a:xfrm>
-          <a:prstGeom prst="rect">
-            <a:avLst/>
-          </a:prstGeom>
-          <a:noFill/>
-        </p:spPr>
-        <p:txBody>
-          <a:bodyPr wrap="square">
-            <a:spAutoFit/>
-          </a:bodyPr>
-          <a:lstStyle/>
-          <a:p>
-            <a:pPr>
-              <a:spcAft>
-                <a:spcPts val="400"/>
-              </a:spcAft>
-              <a:defRPr sz="1300" b="1">
-                <a:solidFill>
-                  <a:srgbClr val="0D3B66"/>
-                </a:solidFill>
-              </a:defRPr>
-            </a:pPr>
-            <a:r>
-              <a:t>BƯỚC 5: AIRFLOW &amp; UI</a:t>
-            </a:r>
-          </a:p>
-          <a:p>
-            <a:pPr>
-              <a:spcAft>
-                <a:spcPts val="250"/>
-              </a:spcAft>
-              <a:defRPr sz="1100">
-                <a:solidFill>
-                  <a:srgbClr val="212529"/>
-                </a:solidFill>
-              </a:defRPr>
-            </a:pPr>
-            <a:r>
-              <a:t>• recommender_pipeline_dag.py</a:t>
-            </a:r>
-          </a:p>
-          <a:p>
-            <a:pPr>
-              <a:spcAft>
-                <a:spcPts val="250"/>
-              </a:spcAft>
-              <a:defRPr sz="1100">
-                <a:solidFill>
-                  <a:srgbClr val="212529"/>
-                </a:solidFill>
-              </a:defRPr>
-            </a:pPr>
-            <a:r>
-              <a:t>• Airflow điều phối 5 tasks tự động.</a:t>
-            </a:r>
-          </a:p>
-          <a:p>
-            <a:pPr>
-              <a:spcAft>
-                <a:spcPts val="250"/>
-              </a:spcAft>
-              <a:defRPr sz="1100">
-                <a:solidFill>
-                  <a:srgbClr val="212529"/>
-                </a:solidFill>
-              </a:defRPr>
-            </a:pPr>
-            <a:r>
-              <a:t>• 03_benchmark.py (13.2x speedup).</a:t>
-            </a:r>
-          </a:p>
-          <a:p>
-            <a:pPr>
-              <a:spcAft>
-                <a:spcPts val="250"/>
-              </a:spcAft>
-              <a:defRPr sz="1100">
-                <a:solidFill>
-                  <a:srgbClr val="212529"/>
-                </a:solidFill>
-              </a:defRPr>
-            </a:pPr>
-            <a:r>
-              <a:t>• Web Streamlit phục vụ thời gian thực (app.py).</a:t>
+              <a:t>• Đáp ứng trọn vẹn yêu cầu Rubric: Có cấu hình topic, mã nguồn Producer/Consumer, luồng HDFS sink và file log đối chiếu đầy đủ.</a:t>
             </a:r>
           </a:p>
         </p:txBody>
@@ -11402,7 +11618,7 @@
               </a:defRPr>
             </a:pPr>
             <a:r>
-              <a:t>PHẦN 3: KIẾN TRÚC HỆ THỐNG (2 - 3 PHÚT)  |  Slide 7/15</a:t>
+              <a:t>PHẦN 3: KIẾN TRÚC HỆ THỐNG (2 - 3 PHÚT)  |  Slide 7/16</a:t>
             </a:r>
           </a:p>
         </p:txBody>
@@ -11437,139 +11653,21 @@
               </a:defRPr>
             </a:pPr>
             <a:r>
-              <a:t>3.2. THỰC NGHIỆM CỤM DOCKER HADOOP HDFS &amp; SPARK CLUSTER</a:t>
-            </a:r>
-          </a:p>
-        </p:txBody>
-      </p:sp>
-      <p:pic>
-        <p:nvPicPr>
-          <p:cNvPr id="5" name="Picture 4" descr="1_HDFS_Storage.png"/>
-          <p:cNvPicPr>
-            <a:picLocks noChangeAspect="1"/>
-          </p:cNvPicPr>
-          <p:nvPr/>
-        </p:nvPicPr>
-        <p:blipFill>
-          <a:blip r:embed="rId3"/>
-          <a:stretch>
-            <a:fillRect/>
-          </a:stretch>
-        </p:blipFill>
-        <p:spPr>
-          <a:xfrm>
-            <a:off x="548640" y="1463040"/>
-            <a:ext cx="5303520" cy="3017520"/>
-          </a:xfrm>
-          <a:prstGeom prst="rect">
-            <a:avLst/>
-          </a:prstGeom>
-        </p:spPr>
-      </p:pic>
-      <p:sp>
-        <p:nvSpPr>
-          <p:cNvPr id="6" name="TextBox 5"/>
-          <p:cNvSpPr txBox="1"/>
-          <p:nvPr/>
-        </p:nvSpPr>
-        <p:spPr>
-          <a:xfrm>
-            <a:off x="548640" y="4526280"/>
-            <a:ext cx="5303520" cy="274320"/>
-          </a:xfrm>
-          <a:prstGeom prst="rect">
-            <a:avLst/>
-          </a:prstGeom>
-          <a:noFill/>
-        </p:spPr>
-        <p:txBody>
-          <a:bodyPr wrap="none">
-            <a:spAutoFit/>
-          </a:bodyPr>
-          <a:lstStyle/>
-          <a:p>
-            <a:pPr algn="ctr">
-              <a:defRPr sz="1000" i="1">
-                <a:solidFill>
-                  <a:srgbClr val="6C757D"/>
-                </a:solidFill>
-              </a:defRPr>
-            </a:pPr>
-            <a:r>
-              <a:t>HDFS Web UI (Port 9870): Datanode In service (223.63 GB, 201 Blocks)</a:t>
-            </a:r>
-          </a:p>
-        </p:txBody>
-      </p:sp>
-      <p:pic>
-        <p:nvPicPr>
-          <p:cNvPr id="7" name="Picture 6" descr="2_Spark_Master.png"/>
-          <p:cNvPicPr>
-            <a:picLocks noChangeAspect="1"/>
-          </p:cNvPicPr>
-          <p:nvPr/>
-        </p:nvPicPr>
-        <p:blipFill>
-          <a:blip r:embed="rId4"/>
-          <a:stretch>
-            <a:fillRect/>
-          </a:stretch>
-        </p:blipFill>
-        <p:spPr>
-          <a:xfrm>
-            <a:off x="6217920" y="1463040"/>
-            <a:ext cx="5394960" cy="3017520"/>
-          </a:xfrm>
-          <a:prstGeom prst="rect">
-            <a:avLst/>
-          </a:prstGeom>
-        </p:spPr>
-      </p:pic>
-      <p:sp>
-        <p:nvSpPr>
-          <p:cNvPr id="8" name="TextBox 7"/>
-          <p:cNvSpPr txBox="1"/>
-          <p:nvPr/>
-        </p:nvSpPr>
-        <p:spPr>
-          <a:xfrm>
-            <a:off x="6217920" y="4526280"/>
-            <a:ext cx="5394960" cy="274320"/>
-          </a:xfrm>
-          <a:prstGeom prst="rect">
-            <a:avLst/>
-          </a:prstGeom>
-          <a:noFill/>
-        </p:spPr>
-        <p:txBody>
-          <a:bodyPr wrap="none">
-            <a:spAutoFit/>
-          </a:bodyPr>
-          <a:lstStyle/>
-          <a:p>
-            <a:pPr algn="ctr">
-              <a:defRPr sz="1000" i="1">
-                <a:solidFill>
-                  <a:srgbClr val="6C757D"/>
-                </a:solidFill>
-              </a:defRPr>
-            </a:pPr>
-            <a:r>
-              <a:t>Spark Master UI (Port 8080): Worker (10 Cores, 6.7 GiB RAM) &amp; Jobs</a:t>
-            </a:r>
-          </a:p>
-        </p:txBody>
-      </p:sp>
-      <p:sp>
-        <p:nvSpPr>
-          <p:cNvPr id="9" name="Rounded Rectangle 8"/>
+              <a:t>3.2. SƠ ĐỒ PIPELINE &amp; ĐIỀU PHỐI TỰ ĐỘNG BẰNG AIRFLOW DAG</a:t>
+            </a:r>
+          </a:p>
+        </p:txBody>
+      </p:sp>
+      <p:sp>
+        <p:nvSpPr>
+          <p:cNvPr id="5" name="Rounded Rectangle 4"/>
           <p:cNvSpPr/>
           <p:nvPr/>
         </p:nvSpPr>
         <p:spPr>
           <a:xfrm>
-            <a:off x="548640" y="4709160"/>
-            <a:ext cx="5303520" cy="1645920"/>
+            <a:off x="457200" y="1463040"/>
+            <a:ext cx="2148840" cy="4937760"/>
           </a:xfrm>
           <a:prstGeom prst="roundRect">
             <a:avLst/>
@@ -11607,20 +11705,20 @@
       </p:sp>
       <p:sp>
         <p:nvSpPr>
-          <p:cNvPr id="10" name="Rectangle 9"/>
+          <p:cNvPr id="6" name="Rectangle 5"/>
           <p:cNvSpPr/>
           <p:nvPr/>
         </p:nvSpPr>
         <p:spPr>
           <a:xfrm>
-            <a:off x="548640" y="4709160"/>
-            <a:ext cx="5303520" cy="64008"/>
+            <a:off x="457200" y="1463040"/>
+            <a:ext cx="2148840" cy="64008"/>
           </a:xfrm>
           <a:prstGeom prst="rect">
             <a:avLst/>
           </a:prstGeom>
           <a:solidFill>
-            <a:srgbClr val="1565C0"/>
+            <a:srgbClr val="0D3B66"/>
           </a:solidFill>
           <a:ln>
             <a:noFill/>
@@ -11650,14 +11748,14 @@
       </p:sp>
       <p:sp>
         <p:nvSpPr>
-          <p:cNvPr id="11" name="TextBox 10"/>
+          <p:cNvPr id="7" name="TextBox 6"/>
           <p:cNvSpPr txBox="1"/>
           <p:nvPr/>
         </p:nvSpPr>
         <p:spPr>
           <a:xfrm>
-            <a:off x="685800" y="4818888"/>
-            <a:ext cx="5029200" cy="1481328"/>
+            <a:off x="594360" y="1572768"/>
+            <a:ext cx="1874520" cy="4773168"/>
           </a:xfrm>
           <a:prstGeom prst="rect">
             <a:avLst/>
@@ -11676,12 +11774,12 @@
               </a:spcAft>
               <a:defRPr sz="1300" b="1">
                 <a:solidFill>
-                  <a:srgbClr val="1565C0"/>
-                </a:solidFill>
-              </a:defRPr>
-            </a:pPr>
-            <a:r>
-              <a:t>HADOOP HDFS CLUSTER (LƯU TRỮ PHÂN TÁN)</a:t>
+                  <a:srgbClr val="0D3B66"/>
+                </a:solidFill>
+              </a:defRPr>
+            </a:pPr>
+            <a:r>
+              <a:t>BƯỚC 1: INGESTION</a:t>
             </a:r>
           </a:p>
           <a:p>
@@ -11696,7 +11794,7 @@
               </a:defRPr>
             </a:pPr>
             <a:r>
-              <a:t>• 1 NameNode (Port 9870/9000): Quản lý Metadata, FsImage &amp; EditLog.</a:t>
+              <a:t>• 00_init_hdfs.sh &amp; Kafka</a:t>
             </a:r>
           </a:p>
           <a:p>
@@ -11711,21 +11809,51 @@
               </a:defRPr>
             </a:pPr>
             <a:r>
-              <a:t>• 2 DataNodes (Hadoop 3.2.1): Lưu trữ Blocks vật lý, Replication = 2 chống mất dữ liệu.</a:t>
-            </a:r>
-          </a:p>
-        </p:txBody>
-      </p:sp>
-      <p:sp>
-        <p:nvSpPr>
-          <p:cNvPr id="12" name="Rounded Rectangle 11"/>
+              <a:t>• Đẩy 1.4 GB events.csv lên HDFS (/data/raw).</a:t>
+            </a:r>
+          </a:p>
+          <a:p>
+            <a:pPr>
+              <a:spcAft>
+                <a:spcPts val="250"/>
+              </a:spcAft>
+              <a:defRPr sz="1100">
+                <a:solidFill>
+                  <a:srgbClr val="212529"/>
+                </a:solidFill>
+              </a:defRPr>
+            </a:pPr>
+            <a:r>
+              <a:t>• 12 Blocks (128MB), Rep=2.</a:t>
+            </a:r>
+          </a:p>
+          <a:p>
+            <a:pPr>
+              <a:spcAft>
+                <a:spcPts val="250"/>
+              </a:spcAft>
+              <a:defRPr sz="1100">
+                <a:solidFill>
+                  <a:srgbClr val="212529"/>
+                </a:solidFill>
+              </a:defRPr>
+            </a:pPr>
+            <a:r>
+              <a:t>• Kafka Consumer sink micro-batch.</a:t>
+            </a:r>
+          </a:p>
+        </p:txBody>
+      </p:sp>
+      <p:sp>
+        <p:nvSpPr>
+          <p:cNvPr id="8" name="Rounded Rectangle 7"/>
           <p:cNvSpPr/>
           <p:nvPr/>
         </p:nvSpPr>
         <p:spPr>
           <a:xfrm>
-            <a:off x="6217920" y="4709160"/>
-            <a:ext cx="5394960" cy="1645920"/>
+            <a:off x="2724912" y="1463040"/>
+            <a:ext cx="2148840" cy="4937760"/>
           </a:xfrm>
           <a:prstGeom prst="roundRect">
             <a:avLst/>
@@ -11763,14 +11891,401 @@
       </p:sp>
       <p:sp>
         <p:nvSpPr>
-          <p:cNvPr id="13" name="Rectangle 12"/>
+          <p:cNvPr id="9" name="Rectangle 8"/>
           <p:cNvSpPr/>
           <p:nvPr/>
         </p:nvSpPr>
         <p:spPr>
           <a:xfrm>
-            <a:off x="6217920" y="4709160"/>
-            <a:ext cx="5394960" cy="64008"/>
+            <a:off x="2724912" y="1463040"/>
+            <a:ext cx="2148840" cy="64008"/>
+          </a:xfrm>
+          <a:prstGeom prst="rect">
+            <a:avLst/>
+          </a:prstGeom>
+          <a:solidFill>
+            <a:srgbClr val="1565C0"/>
+          </a:solidFill>
+          <a:ln>
+            <a:noFill/>
+          </a:ln>
+        </p:spPr>
+        <p:style>
+          <a:lnRef idx="1">
+            <a:schemeClr val="accent1"/>
+          </a:lnRef>
+          <a:fillRef idx="3">
+            <a:schemeClr val="accent1"/>
+          </a:fillRef>
+          <a:effectRef idx="2">
+            <a:schemeClr val="accent1"/>
+          </a:effectRef>
+          <a:fontRef idx="minor">
+            <a:schemeClr val="lt1"/>
+          </a:fontRef>
+        </p:style>
+        <p:txBody>
+          <a:bodyPr rtlCol="0" anchor="ctr"/>
+          <a:lstStyle/>
+          <a:p>
+            <a:pPr algn="ctr"/>
+          </a:p>
+        </p:txBody>
+      </p:sp>
+      <p:sp>
+        <p:nvSpPr>
+          <p:cNvPr id="10" name="TextBox 9"/>
+          <p:cNvSpPr txBox="1"/>
+          <p:nvPr/>
+        </p:nvSpPr>
+        <p:spPr>
+          <a:xfrm>
+            <a:off x="2862072" y="1572768"/>
+            <a:ext cx="1874520" cy="4773168"/>
+          </a:xfrm>
+          <a:prstGeom prst="rect">
+            <a:avLst/>
+          </a:prstGeom>
+          <a:noFill/>
+        </p:spPr>
+        <p:txBody>
+          <a:bodyPr wrap="square">
+            <a:spAutoFit/>
+          </a:bodyPr>
+          <a:lstStyle/>
+          <a:p>
+            <a:pPr>
+              <a:spcAft>
+                <a:spcPts val="400"/>
+              </a:spcAft>
+              <a:defRPr sz="1300" b="1">
+                <a:solidFill>
+                  <a:srgbClr val="1565C0"/>
+                </a:solidFill>
+              </a:defRPr>
+            </a:pPr>
+            <a:r>
+              <a:t>BƯỚC 2: SPARK ETL</a:t>
+            </a:r>
+          </a:p>
+          <a:p>
+            <a:pPr>
+              <a:spcAft>
+                <a:spcPts val="250"/>
+              </a:spcAft>
+              <a:defRPr sz="1100">
+                <a:solidFill>
+                  <a:srgbClr val="212529"/>
+                </a:solidFill>
+              </a:defRPr>
+            </a:pPr>
+            <a:r>
+              <a:t>• Script: 01_etl.py</a:t>
+            </a:r>
+          </a:p>
+          <a:p>
+            <a:pPr>
+              <a:spcAft>
+                <a:spcPts val="250"/>
+              </a:spcAft>
+              <a:defRPr sz="1100">
+                <a:solidFill>
+                  <a:srgbClr val="212529"/>
+                </a:solidFill>
+              </a:defRPr>
+            </a:pPr>
+            <a:r>
+              <a:t>• Đọc CSV phân tán từ HDFS.</a:t>
+            </a:r>
+          </a:p>
+          <a:p>
+            <a:pPr>
+              <a:spcAft>
+                <a:spcPts val="250"/>
+              </a:spcAft>
+              <a:defRPr sz="1100">
+                <a:solidFill>
+                  <a:srgbClr val="212529"/>
+                </a:solidFill>
+              </a:defRPr>
+            </a:pPr>
+            <a:r>
+              <a:t>• Làm sạch dropna, dropDuplicates.</a:t>
+            </a:r>
+          </a:p>
+          <a:p>
+            <a:pPr>
+              <a:spcAft>
+                <a:spcPts val="250"/>
+              </a:spcAft>
+              <a:defRPr sz="1100">
+                <a:solidFill>
+                  <a:srgbClr val="212529"/>
+                </a:solidFill>
+              </a:defRPr>
+            </a:pPr>
+            <a:r>
+              <a:t>• Gán điểm View=1, Cart=2, Buy=3.</a:t>
+            </a:r>
+          </a:p>
+          <a:p>
+            <a:pPr>
+              <a:spcAft>
+                <a:spcPts val="250"/>
+              </a:spcAft>
+              <a:defRPr sz="1100">
+                <a:solidFill>
+                  <a:srgbClr val="212529"/>
+                </a:solidFill>
+              </a:defRPr>
+            </a:pPr>
+            <a:r>
+              <a:t>• Lưu Parquet Snappy (72MB).</a:t>
+            </a:r>
+          </a:p>
+        </p:txBody>
+      </p:sp>
+      <p:sp>
+        <p:nvSpPr>
+          <p:cNvPr id="11" name="Rounded Rectangle 10"/>
+          <p:cNvSpPr/>
+          <p:nvPr/>
+        </p:nvSpPr>
+        <p:spPr>
+          <a:xfrm>
+            <a:off x="4992624" y="1463040"/>
+            <a:ext cx="2148840" cy="4937760"/>
+          </a:xfrm>
+          <a:prstGeom prst="roundRect">
+            <a:avLst/>
+          </a:prstGeom>
+          <a:solidFill>
+            <a:srgbClr val="F5F8FC"/>
+          </a:solidFill>
+          <a:ln w="12700">
+            <a:solidFill>
+              <a:srgbClr val="BBDEFB"/>
+            </a:solidFill>
+          </a:ln>
+        </p:spPr>
+        <p:style>
+          <a:lnRef idx="1">
+            <a:schemeClr val="accent1"/>
+          </a:lnRef>
+          <a:fillRef idx="3">
+            <a:schemeClr val="accent1"/>
+          </a:fillRef>
+          <a:effectRef idx="2">
+            <a:schemeClr val="accent1"/>
+          </a:effectRef>
+          <a:fontRef idx="minor">
+            <a:schemeClr val="lt1"/>
+          </a:fontRef>
+        </p:style>
+        <p:txBody>
+          <a:bodyPr rtlCol="0" anchor="ctr"/>
+          <a:lstStyle/>
+          <a:p>
+            <a:pPr algn="ctr"/>
+          </a:p>
+        </p:txBody>
+      </p:sp>
+      <p:sp>
+        <p:nvSpPr>
+          <p:cNvPr id="12" name="Rectangle 11"/>
+          <p:cNvSpPr/>
+          <p:nvPr/>
+        </p:nvSpPr>
+        <p:spPr>
+          <a:xfrm>
+            <a:off x="4992624" y="1463040"/>
+            <a:ext cx="2148840" cy="64008"/>
+          </a:xfrm>
+          <a:prstGeom prst="rect">
+            <a:avLst/>
+          </a:prstGeom>
+          <a:solidFill>
+            <a:srgbClr val="E65100"/>
+          </a:solidFill>
+          <a:ln>
+            <a:noFill/>
+          </a:ln>
+        </p:spPr>
+        <p:style>
+          <a:lnRef idx="1">
+            <a:schemeClr val="accent1"/>
+          </a:lnRef>
+          <a:fillRef idx="3">
+            <a:schemeClr val="accent1"/>
+          </a:fillRef>
+          <a:effectRef idx="2">
+            <a:schemeClr val="accent1"/>
+          </a:effectRef>
+          <a:fontRef idx="minor">
+            <a:schemeClr val="lt1"/>
+          </a:fontRef>
+        </p:style>
+        <p:txBody>
+          <a:bodyPr rtlCol="0" anchor="ctr"/>
+          <a:lstStyle/>
+          <a:p>
+            <a:pPr algn="ctr"/>
+          </a:p>
+        </p:txBody>
+      </p:sp>
+      <p:sp>
+        <p:nvSpPr>
+          <p:cNvPr id="13" name="TextBox 12"/>
+          <p:cNvSpPr txBox="1"/>
+          <p:nvPr/>
+        </p:nvSpPr>
+        <p:spPr>
+          <a:xfrm>
+            <a:off x="5129784" y="1572768"/>
+            <a:ext cx="1874520" cy="4773168"/>
+          </a:xfrm>
+          <a:prstGeom prst="rect">
+            <a:avLst/>
+          </a:prstGeom>
+          <a:noFill/>
+        </p:spPr>
+        <p:txBody>
+          <a:bodyPr wrap="square">
+            <a:spAutoFit/>
+          </a:bodyPr>
+          <a:lstStyle/>
+          <a:p>
+            <a:pPr>
+              <a:spcAft>
+                <a:spcPts val="400"/>
+              </a:spcAft>
+              <a:defRPr sz="1300" b="1">
+                <a:solidFill>
+                  <a:srgbClr val="E65100"/>
+                </a:solidFill>
+              </a:defRPr>
+            </a:pPr>
+            <a:r>
+              <a:t>BƯỚC 3: SPARK SQL</a:t>
+            </a:r>
+          </a:p>
+          <a:p>
+            <a:pPr>
+              <a:spcAft>
+                <a:spcPts val="250"/>
+              </a:spcAft>
+              <a:defRPr sz="1100">
+                <a:solidFill>
+                  <a:srgbClr val="212529"/>
+                </a:solidFill>
+              </a:defRPr>
+            </a:pPr>
+            <a:r>
+              <a:t>• Script: 01b_spark_sql.py</a:t>
+            </a:r>
+          </a:p>
+          <a:p>
+            <a:pPr>
+              <a:spcAft>
+                <a:spcPts val="250"/>
+              </a:spcAft>
+              <a:defRPr sz="1100">
+                <a:solidFill>
+                  <a:srgbClr val="212529"/>
+                </a:solidFill>
+              </a:defRPr>
+            </a:pPr>
+            <a:r>
+              <a:t>• Tạo bảng tạm events_table.</a:t>
+            </a:r>
+          </a:p>
+          <a:p>
+            <a:pPr>
+              <a:spcAft>
+                <a:spcPts val="250"/>
+              </a:spcAft>
+              <a:defRPr sz="1100">
+                <a:solidFill>
+                  <a:srgbClr val="212529"/>
+                </a:solidFill>
+              </a:defRPr>
+            </a:pPr>
+            <a:r>
+              <a:t>• Catalyst Optimizer tìm Top 10 SP tương tác cao nhất.</a:t>
+            </a:r>
+          </a:p>
+          <a:p>
+            <a:pPr>
+              <a:spcAft>
+                <a:spcPts val="250"/>
+              </a:spcAft>
+              <a:defRPr sz="1100">
+                <a:solidFill>
+                  <a:srgbClr val="212529"/>
+                </a:solidFill>
+              </a:defRPr>
+            </a:pPr>
+            <a:r>
+              <a:t>• Giải quyết triệt để Cold-Start.</a:t>
+            </a:r>
+          </a:p>
+        </p:txBody>
+      </p:sp>
+      <p:sp>
+        <p:nvSpPr>
+          <p:cNvPr id="14" name="Rounded Rectangle 13"/>
+          <p:cNvSpPr/>
+          <p:nvPr/>
+        </p:nvSpPr>
+        <p:spPr>
+          <a:xfrm>
+            <a:off x="7260336" y="1463040"/>
+            <a:ext cx="2148840" cy="4937760"/>
+          </a:xfrm>
+          <a:prstGeom prst="roundRect">
+            <a:avLst/>
+          </a:prstGeom>
+          <a:solidFill>
+            <a:srgbClr val="F5F8FC"/>
+          </a:solidFill>
+          <a:ln w="12700">
+            <a:solidFill>
+              <a:srgbClr val="BBDEFB"/>
+            </a:solidFill>
+          </a:ln>
+        </p:spPr>
+        <p:style>
+          <a:lnRef idx="1">
+            <a:schemeClr val="accent1"/>
+          </a:lnRef>
+          <a:fillRef idx="3">
+            <a:schemeClr val="accent1"/>
+          </a:fillRef>
+          <a:effectRef idx="2">
+            <a:schemeClr val="accent1"/>
+          </a:effectRef>
+          <a:fontRef idx="minor">
+            <a:schemeClr val="lt1"/>
+          </a:fontRef>
+        </p:style>
+        <p:txBody>
+          <a:bodyPr rtlCol="0" anchor="ctr"/>
+          <a:lstStyle/>
+          <a:p>
+            <a:pPr algn="ctr"/>
+          </a:p>
+        </p:txBody>
+      </p:sp>
+      <p:sp>
+        <p:nvSpPr>
+          <p:cNvPr id="15" name="Rectangle 14"/>
+          <p:cNvSpPr/>
+          <p:nvPr/>
+        </p:nvSpPr>
+        <p:spPr>
+          <a:xfrm>
+            <a:off x="7260336" y="1463040"/>
+            <a:ext cx="2148840" cy="64008"/>
           </a:xfrm>
           <a:prstGeom prst="rect">
             <a:avLst/>
@@ -11806,14 +12321,14 @@
       </p:sp>
       <p:sp>
         <p:nvSpPr>
-          <p:cNvPr id="14" name="TextBox 13"/>
+          <p:cNvPr id="16" name="TextBox 15"/>
           <p:cNvSpPr txBox="1"/>
           <p:nvPr/>
         </p:nvSpPr>
         <p:spPr>
           <a:xfrm>
-            <a:off x="6355080" y="4818888"/>
-            <a:ext cx="5120640" cy="1481328"/>
+            <a:off x="7397496" y="1572768"/>
+            <a:ext cx="1874520" cy="4773168"/>
           </a:xfrm>
           <a:prstGeom prst="rect">
             <a:avLst/>
@@ -11837,7 +12352,7 @@
               </a:defRPr>
             </a:pPr>
             <a:r>
-              <a:t>APACHE SPARK CLUSTER (TÍNH TOÁN IN-MEMORY)</a:t>
+              <a:t>BƯỚC 4: SPARK MLLIB</a:t>
             </a:r>
           </a:p>
           <a:p>
@@ -11852,7 +12367,7 @@
               </a:defRPr>
             </a:pPr>
             <a:r>
-              <a:t>• 1 Spark Master + 2 Spark Workers (Port 8081/8082).</a:t>
+              <a:t>• Script: 02_train_als.py</a:t>
             </a:r>
           </a:p>
           <a:p>
@@ -11867,7 +12382,223 @@
               </a:defRPr>
             </a:pPr>
             <a:r>
-              <a:t>• Thực thi hoàn tất (FINISHED): RetailRocket_ETL (56s) &amp; TopProducts (32s).</a:t>
+              <a:t>• Đọc Parquet nén Snappy.</a:t>
+            </a:r>
+          </a:p>
+          <a:p>
+            <a:pPr>
+              <a:spcAft>
+                <a:spcPts val="250"/>
+              </a:spcAft>
+              <a:defRPr sz="1100">
+                <a:solidFill>
+                  <a:srgbClr val="212529"/>
+                </a:solidFill>
+              </a:defRPr>
+            </a:pPr>
+            <a:r>
+              <a:t>• Huấn luyện Implicit ALS 10 vòng.</a:t>
+            </a:r>
+          </a:p>
+          <a:p>
+            <a:pPr>
+              <a:spcAft>
+                <a:spcPts val="250"/>
+              </a:spcAft>
+              <a:defRPr sz="1100">
+                <a:solidFill>
+                  <a:srgbClr val="212529"/>
+                </a:solidFill>
+              </a:defRPr>
+            </a:pPr>
+            <a:r>
+              <a:t>• Hội tụ RMSE ~ 0.02108, lưu model vào /spark/models.</a:t>
+            </a:r>
+          </a:p>
+        </p:txBody>
+      </p:sp>
+      <p:sp>
+        <p:nvSpPr>
+          <p:cNvPr id="17" name="Rounded Rectangle 16"/>
+          <p:cNvSpPr/>
+          <p:nvPr/>
+        </p:nvSpPr>
+        <p:spPr>
+          <a:xfrm>
+            <a:off x="9528048" y="1463040"/>
+            <a:ext cx="2148840" cy="4937760"/>
+          </a:xfrm>
+          <a:prstGeom prst="roundRect">
+            <a:avLst/>
+          </a:prstGeom>
+          <a:solidFill>
+            <a:srgbClr val="F5F8FC"/>
+          </a:solidFill>
+          <a:ln w="12700">
+            <a:solidFill>
+              <a:srgbClr val="BBDEFB"/>
+            </a:solidFill>
+          </a:ln>
+        </p:spPr>
+        <p:style>
+          <a:lnRef idx="1">
+            <a:schemeClr val="accent1"/>
+          </a:lnRef>
+          <a:fillRef idx="3">
+            <a:schemeClr val="accent1"/>
+          </a:fillRef>
+          <a:effectRef idx="2">
+            <a:schemeClr val="accent1"/>
+          </a:effectRef>
+          <a:fontRef idx="minor">
+            <a:schemeClr val="lt1"/>
+          </a:fontRef>
+        </p:style>
+        <p:txBody>
+          <a:bodyPr rtlCol="0" anchor="ctr"/>
+          <a:lstStyle/>
+          <a:p>
+            <a:pPr algn="ctr"/>
+          </a:p>
+        </p:txBody>
+      </p:sp>
+      <p:sp>
+        <p:nvSpPr>
+          <p:cNvPr id="18" name="Rectangle 17"/>
+          <p:cNvSpPr/>
+          <p:nvPr/>
+        </p:nvSpPr>
+        <p:spPr>
+          <a:xfrm>
+            <a:off x="9528048" y="1463040"/>
+            <a:ext cx="2148840" cy="64008"/>
+          </a:xfrm>
+          <a:prstGeom prst="rect">
+            <a:avLst/>
+          </a:prstGeom>
+          <a:solidFill>
+            <a:srgbClr val="0D3B66"/>
+          </a:solidFill>
+          <a:ln>
+            <a:noFill/>
+          </a:ln>
+        </p:spPr>
+        <p:style>
+          <a:lnRef idx="1">
+            <a:schemeClr val="accent1"/>
+          </a:lnRef>
+          <a:fillRef idx="3">
+            <a:schemeClr val="accent1"/>
+          </a:fillRef>
+          <a:effectRef idx="2">
+            <a:schemeClr val="accent1"/>
+          </a:effectRef>
+          <a:fontRef idx="minor">
+            <a:schemeClr val="lt1"/>
+          </a:fontRef>
+        </p:style>
+        <p:txBody>
+          <a:bodyPr rtlCol="0" anchor="ctr"/>
+          <a:lstStyle/>
+          <a:p>
+            <a:pPr algn="ctr"/>
+          </a:p>
+        </p:txBody>
+      </p:sp>
+      <p:sp>
+        <p:nvSpPr>
+          <p:cNvPr id="19" name="TextBox 18"/>
+          <p:cNvSpPr txBox="1"/>
+          <p:nvPr/>
+        </p:nvSpPr>
+        <p:spPr>
+          <a:xfrm>
+            <a:off x="9665208" y="1572768"/>
+            <a:ext cx="1874520" cy="4773168"/>
+          </a:xfrm>
+          <a:prstGeom prst="rect">
+            <a:avLst/>
+          </a:prstGeom>
+          <a:noFill/>
+        </p:spPr>
+        <p:txBody>
+          <a:bodyPr wrap="square">
+            <a:spAutoFit/>
+          </a:bodyPr>
+          <a:lstStyle/>
+          <a:p>
+            <a:pPr>
+              <a:spcAft>
+                <a:spcPts val="400"/>
+              </a:spcAft>
+              <a:defRPr sz="1300" b="1">
+                <a:solidFill>
+                  <a:srgbClr val="0D3B66"/>
+                </a:solidFill>
+              </a:defRPr>
+            </a:pPr>
+            <a:r>
+              <a:t>BƯỚC 5: AIRFLOW &amp; UI</a:t>
+            </a:r>
+          </a:p>
+          <a:p>
+            <a:pPr>
+              <a:spcAft>
+                <a:spcPts val="250"/>
+              </a:spcAft>
+              <a:defRPr sz="1100">
+                <a:solidFill>
+                  <a:srgbClr val="212529"/>
+                </a:solidFill>
+              </a:defRPr>
+            </a:pPr>
+            <a:r>
+              <a:t>• recommender_pipeline_dag.py</a:t>
+            </a:r>
+          </a:p>
+          <a:p>
+            <a:pPr>
+              <a:spcAft>
+                <a:spcPts val="250"/>
+              </a:spcAft>
+              <a:defRPr sz="1100">
+                <a:solidFill>
+                  <a:srgbClr val="212529"/>
+                </a:solidFill>
+              </a:defRPr>
+            </a:pPr>
+            <a:r>
+              <a:t>• Airflow điều phối 5 tasks tự động.</a:t>
+            </a:r>
+          </a:p>
+          <a:p>
+            <a:pPr>
+              <a:spcAft>
+                <a:spcPts val="250"/>
+              </a:spcAft>
+              <a:defRPr sz="1100">
+                <a:solidFill>
+                  <a:srgbClr val="212529"/>
+                </a:solidFill>
+              </a:defRPr>
+            </a:pPr>
+            <a:r>
+              <a:t>• 03_benchmark.py (13.2x speedup).</a:t>
+            </a:r>
+          </a:p>
+          <a:p>
+            <a:pPr>
+              <a:spcAft>
+                <a:spcPts val="250"/>
+              </a:spcAft>
+              <a:defRPr sz="1100">
+                <a:solidFill>
+                  <a:srgbClr val="212529"/>
+                </a:solidFill>
+              </a:defRPr>
+            </a:pPr>
+            <a:r>
+              <a:t>• Web Streamlit phục vụ thời gian thực (app.py).</a:t>
             </a:r>
           </a:p>
         </p:txBody>
@@ -11944,7 +12675,7 @@
               </a:defRPr>
             </a:pPr>
             <a:r>
-              <a:t>PHẦN 4: XỬ LÝ DỮ LIỆU - ETL (3 - 4 PHÚT)  |  Slide 8/15</a:t>
+              <a:t>PHẦN 3: KIẾN TRÚC HỆ THỐNG (2 - 3 PHÚT)  |  Slide 8/16</a:t>
             </a:r>
           </a:p>
         </p:txBody>
@@ -11979,21 +12710,139 @@
               </a:defRPr>
             </a:pPr>
             <a:r>
-              <a:t>4.1. LOGIC LÀM SẠCH &amp; BIẾN ĐỔI PHÂN TÁN TRÊN SPARK (01_ETL.PY)</a:t>
-            </a:r>
-          </a:p>
-        </p:txBody>
-      </p:sp>
-      <p:sp>
-        <p:nvSpPr>
-          <p:cNvPr id="5" name="Rounded Rectangle 4"/>
+              <a:t>3.3. THỰC NGHIỆM CỤM DOCKER HADOOP HDFS &amp; SPARK CLUSTER</a:t>
+            </a:r>
+          </a:p>
+        </p:txBody>
+      </p:sp>
+      <p:pic>
+        <p:nvPicPr>
+          <p:cNvPr id="5" name="Picture 4" descr="1_HDFS_Storage.png"/>
+          <p:cNvPicPr>
+            <a:picLocks noChangeAspect="1"/>
+          </p:cNvPicPr>
+          <p:nvPr/>
+        </p:nvPicPr>
+        <p:blipFill>
+          <a:blip r:embed="rId3"/>
+          <a:stretch>
+            <a:fillRect/>
+          </a:stretch>
+        </p:blipFill>
+        <p:spPr>
+          <a:xfrm>
+            <a:off x="548640" y="1463040"/>
+            <a:ext cx="5303520" cy="3017520"/>
+          </a:xfrm>
+          <a:prstGeom prst="rect">
+            <a:avLst/>
+          </a:prstGeom>
+        </p:spPr>
+      </p:pic>
+      <p:sp>
+        <p:nvSpPr>
+          <p:cNvPr id="6" name="TextBox 5"/>
+          <p:cNvSpPr txBox="1"/>
+          <p:nvPr/>
+        </p:nvSpPr>
+        <p:spPr>
+          <a:xfrm>
+            <a:off x="548640" y="4526280"/>
+            <a:ext cx="5303520" cy="274320"/>
+          </a:xfrm>
+          <a:prstGeom prst="rect">
+            <a:avLst/>
+          </a:prstGeom>
+          <a:noFill/>
+        </p:spPr>
+        <p:txBody>
+          <a:bodyPr wrap="none">
+            <a:spAutoFit/>
+          </a:bodyPr>
+          <a:lstStyle/>
+          <a:p>
+            <a:pPr algn="ctr">
+              <a:defRPr sz="1000" i="1">
+                <a:solidFill>
+                  <a:srgbClr val="6C757D"/>
+                </a:solidFill>
+              </a:defRPr>
+            </a:pPr>
+            <a:r>
+              <a:t>HDFS Web UI (Port 9870): Datanode In service (223.63 GB, 201 Blocks)</a:t>
+            </a:r>
+          </a:p>
+        </p:txBody>
+      </p:sp>
+      <p:pic>
+        <p:nvPicPr>
+          <p:cNvPr id="7" name="Picture 6" descr="2_Spark_Master.png"/>
+          <p:cNvPicPr>
+            <a:picLocks noChangeAspect="1"/>
+          </p:cNvPicPr>
+          <p:nvPr/>
+        </p:nvPicPr>
+        <p:blipFill>
+          <a:blip r:embed="rId4"/>
+          <a:stretch>
+            <a:fillRect/>
+          </a:stretch>
+        </p:blipFill>
+        <p:spPr>
+          <a:xfrm>
+            <a:off x="6217920" y="1463040"/>
+            <a:ext cx="5394960" cy="3017520"/>
+          </a:xfrm>
+          <a:prstGeom prst="rect">
+            <a:avLst/>
+          </a:prstGeom>
+        </p:spPr>
+      </p:pic>
+      <p:sp>
+        <p:nvSpPr>
+          <p:cNvPr id="8" name="TextBox 7"/>
+          <p:cNvSpPr txBox="1"/>
+          <p:nvPr/>
+        </p:nvSpPr>
+        <p:spPr>
+          <a:xfrm>
+            <a:off x="6217920" y="4526280"/>
+            <a:ext cx="5394960" cy="274320"/>
+          </a:xfrm>
+          <a:prstGeom prst="rect">
+            <a:avLst/>
+          </a:prstGeom>
+          <a:noFill/>
+        </p:spPr>
+        <p:txBody>
+          <a:bodyPr wrap="none">
+            <a:spAutoFit/>
+          </a:bodyPr>
+          <a:lstStyle/>
+          <a:p>
+            <a:pPr algn="ctr">
+              <a:defRPr sz="1000" i="1">
+                <a:solidFill>
+                  <a:srgbClr val="6C757D"/>
+                </a:solidFill>
+              </a:defRPr>
+            </a:pPr>
+            <a:r>
+              <a:t>Spark Master UI (Port 8080): Worker (10 Cores, 6.7 GiB RAM) &amp; Jobs</a:t>
+            </a:r>
+          </a:p>
+        </p:txBody>
+      </p:sp>
+      <p:sp>
+        <p:nvSpPr>
+          <p:cNvPr id="9" name="Rounded Rectangle 8"/>
           <p:cNvSpPr/>
           <p:nvPr/>
         </p:nvSpPr>
         <p:spPr>
           <a:xfrm>
-            <a:off x="548640" y="1463040"/>
-            <a:ext cx="5394960" cy="4937760"/>
+            <a:off x="548640" y="4709160"/>
+            <a:ext cx="5303520" cy="1645920"/>
           </a:xfrm>
           <a:prstGeom prst="roundRect">
             <a:avLst/>
@@ -12031,14 +12880,14 @@
       </p:sp>
       <p:sp>
         <p:nvSpPr>
-          <p:cNvPr id="6" name="Rectangle 5"/>
+          <p:cNvPr id="10" name="Rectangle 9"/>
           <p:cNvSpPr/>
           <p:nvPr/>
         </p:nvSpPr>
         <p:spPr>
           <a:xfrm>
-            <a:off x="548640" y="1463040"/>
-            <a:ext cx="5394960" cy="64008"/>
+            <a:off x="548640" y="4709160"/>
+            <a:ext cx="5303520" cy="64008"/>
           </a:xfrm>
           <a:prstGeom prst="rect">
             <a:avLst/>
@@ -12074,14 +12923,14 @@
       </p:sp>
       <p:sp>
         <p:nvSpPr>
-          <p:cNvPr id="7" name="TextBox 6"/>
+          <p:cNvPr id="11" name="TextBox 10"/>
           <p:cNvSpPr txBox="1"/>
           <p:nvPr/>
         </p:nvSpPr>
         <p:spPr>
           <a:xfrm>
-            <a:off x="685800" y="1572768"/>
-            <a:ext cx="5120640" cy="4773168"/>
+            <a:off x="685800" y="4818888"/>
+            <a:ext cx="5029200" cy="1481328"/>
           </a:xfrm>
           <a:prstGeom prst="rect">
             <a:avLst/>
@@ -12105,7 +12954,7 @@
               </a:defRPr>
             </a:pPr>
             <a:r>
-              <a:t>1. NARROW TRANSFORMATION (XỬ LÝ CỤC BỘ TRÊN RAM)</a:t>
+              <a:t>HADOOP HDFS CLUSTER (LƯU TRỮ PHÂN TÁN)</a:t>
             </a:r>
           </a:p>
           <a:p>
@@ -12120,7 +12969,7 @@
               </a:defRPr>
             </a:pPr>
             <a:r>
-              <a:t>• Các phép toán dropna() và withColumn() thực thi độc lập trên từng Partition của mỗi Worker.</a:t>
+              <a:t>• 1 NameNode (Port 9870/9000): Quản lý Metadata, FsImage &amp; EditLog.</a:t>
             </a:r>
           </a:p>
           <a:p>
@@ -12135,36 +12984,21 @@
               </a:defRPr>
             </a:pPr>
             <a:r>
-              <a:t>• Không phát sinh truyền tải dữ liệu qua mạng giữa các node.</a:t>
-            </a:r>
-          </a:p>
-          <a:p>
-            <a:pPr>
-              <a:spcAft>
-                <a:spcPts val="250"/>
-              </a:spcAft>
-              <a:defRPr sz="1100">
-                <a:solidFill>
-                  <a:srgbClr val="212529"/>
-                </a:solidFill>
-              </a:defRPr>
-            </a:pPr>
-            <a:r>
-              <a:t>• Feature Engineering (Implicit Feedback Scoring): Quy đổi view = 1 điểm, addtocart = 2 điểm, transaction = 3 điểm.</a:t>
-            </a:r>
-          </a:p>
-        </p:txBody>
-      </p:sp>
-      <p:sp>
-        <p:nvSpPr>
-          <p:cNvPr id="8" name="Rounded Rectangle 7"/>
+              <a:t>• 2 DataNodes (Hadoop 3.2.1): Lưu trữ Blocks vật lý, Replication = 2 chống mất dữ liệu.</a:t>
+            </a:r>
+          </a:p>
+        </p:txBody>
+      </p:sp>
+      <p:sp>
+        <p:nvSpPr>
+          <p:cNvPr id="12" name="Rounded Rectangle 11"/>
           <p:cNvSpPr/>
           <p:nvPr/>
         </p:nvSpPr>
         <p:spPr>
           <a:xfrm>
-            <a:off x="6217920" y="1463040"/>
-            <a:ext cx="5394960" cy="4937760"/>
+            <a:off x="6217920" y="4709160"/>
+            <a:ext cx="5394960" cy="1645920"/>
           </a:xfrm>
           <a:prstGeom prst="roundRect">
             <a:avLst/>
@@ -12202,20 +13036,20 @@
       </p:sp>
       <p:sp>
         <p:nvSpPr>
-          <p:cNvPr id="9" name="Rectangle 8"/>
+          <p:cNvPr id="13" name="Rectangle 12"/>
           <p:cNvSpPr/>
           <p:nvPr/>
         </p:nvSpPr>
         <p:spPr>
           <a:xfrm>
-            <a:off x="6217920" y="1463040"/>
+            <a:off x="6217920" y="4709160"/>
             <a:ext cx="5394960" cy="64008"/>
           </a:xfrm>
           <a:prstGeom prst="rect">
             <a:avLst/>
           </a:prstGeom>
           <a:solidFill>
-            <a:srgbClr val="E65100"/>
+            <a:srgbClr val="2E7D32"/>
           </a:solidFill>
           <a:ln>
             <a:noFill/>
@@ -12245,14 +13079,14 @@
       </p:sp>
       <p:sp>
         <p:nvSpPr>
-          <p:cNvPr id="10" name="TextBox 9"/>
+          <p:cNvPr id="14" name="TextBox 13"/>
           <p:cNvSpPr txBox="1"/>
           <p:nvPr/>
         </p:nvSpPr>
         <p:spPr>
           <a:xfrm>
-            <a:off x="6355080" y="1572768"/>
-            <a:ext cx="5120640" cy="4773168"/>
+            <a:off x="6355080" y="4818888"/>
+            <a:ext cx="5120640" cy="1481328"/>
           </a:xfrm>
           <a:prstGeom prst="rect">
             <a:avLst/>
@@ -12271,12 +13105,12 @@
               </a:spcAft>
               <a:defRPr sz="1300" b="1">
                 <a:solidFill>
-                  <a:srgbClr val="E65100"/>
-                </a:solidFill>
-              </a:defRPr>
-            </a:pPr>
-            <a:r>
-              <a:t>2. WIDE TRANSFORMATION &amp; CƠ CHẾ SHUFFLE</a:t>
+                  <a:srgbClr val="2E7D32"/>
+                </a:solidFill>
+              </a:defRPr>
+            </a:pPr>
+            <a:r>
+              <a:t>APACHE SPARK CLUSTER (TÍNH TOÁN IN-MEMORY)</a:t>
             </a:r>
           </a:p>
           <a:p>
@@ -12291,7 +13125,7 @@
               </a:defRPr>
             </a:pPr>
             <a:r>
-              <a:t>• Phép toán dropDuplicates() và groupBy('visitorid', 'itemid').agg(sum('score').alias('rating')).</a:t>
+              <a:t>• 1 Spark Master + 2 Spark Workers (Port 8081/8082).</a:t>
             </a:r>
           </a:p>
           <a:p>
@@ -12306,37 +13140,7 @@
               </a:defRPr>
             </a:pPr>
             <a:r>
-              <a:t>• Bắt buộc Spark thực hiện Shuffle: Gom các bản ghi cùng (visitorid, itemid) nằm rải rác ở các Workers về chung Partition.</a:t>
-            </a:r>
-          </a:p>
-          <a:p>
-            <a:pPr>
-              <a:spcAft>
-                <a:spcPts val="250"/>
-              </a:spcAft>
-              <a:defRPr sz="1100">
-                <a:solidFill>
-                  <a:srgbClr val="212529"/>
-                </a:solidFill>
-              </a:defRPr>
-            </a:pPr>
-            <a:r>
-              <a:t>• Tạo ra Ma trận Tương tác 3 cột chuẩn: visitorid | itemid | rating.</a:t>
-            </a:r>
-          </a:p>
-          <a:p>
-            <a:pPr>
-              <a:spcAft>
-                <a:spcPts val="250"/>
-              </a:spcAft>
-              <a:defRPr sz="1100">
-                <a:solidFill>
-                  <a:srgbClr val="212529"/>
-                </a:solidFill>
-              </a:defRPr>
-            </a:pPr>
-            <a:r>
-              <a:t>• Lazy Evaluation: Catalyst Optimizer tối ưu DAG trước khi ghi file Parquet nén Snappy xuống HDFS.</a:t>
+              <a:t>• Thực thi hoàn tất (FINISHED): RetailRocket_ETL (56s) &amp; TopProducts (32s).</a:t>
             </a:r>
           </a:p>
         </p:txBody>
@@ -12413,7 +13217,7 @@
               </a:defRPr>
             </a:pPr>
             <a:r>
-              <a:t>PHẦN 4: XỬ LÝ DỮ LIỆU - ETL (3 - 4 PHÚT)  |  Slide 9/15</a:t>
+              <a:t>PHẦN 4: XỬ LÝ DỮ LIỆU - ETL (3 - 4 PHÚT)  |  Slide 9/16</a:t>
             </a:r>
           </a:p>
         </p:txBody>
@@ -12448,139 +13252,21 @@
               </a:defRPr>
             </a:pPr>
             <a:r>
-              <a:t>4.2. THỰC NGHIỆM BENCHMARK: CSV THÔ VS. PARQUET TỐI ƯU</a:t>
-            </a:r>
-          </a:p>
-        </p:txBody>
-      </p:sp>
-      <p:pic>
-        <p:nvPicPr>
-          <p:cNvPr id="5" name="Picture 4" descr="7_Benchmark_Storage_Comparison.png"/>
-          <p:cNvPicPr>
-            <a:picLocks noChangeAspect="1"/>
-          </p:cNvPicPr>
-          <p:nvPr/>
-        </p:nvPicPr>
-        <p:blipFill>
-          <a:blip r:embed="rId3"/>
-          <a:stretch>
-            <a:fillRect/>
-          </a:stretch>
-        </p:blipFill>
+              <a:t>4.1. LOGIC LÀM SẠCH &amp; BIẾN ĐỔI PHÂN TÁN TRÊN SPARK (01_ETL.PY)</a:t>
+            </a:r>
+          </a:p>
+        </p:txBody>
+      </p:sp>
+      <p:sp>
+        <p:nvSpPr>
+          <p:cNvPr id="5" name="Rounded Rectangle 4"/>
+          <p:cNvSpPr/>
+          <p:nvPr/>
+        </p:nvSpPr>
         <p:spPr>
           <a:xfrm>
             <a:off x="548640" y="1463040"/>
-            <a:ext cx="5303520" cy="3017520"/>
-          </a:xfrm>
-          <a:prstGeom prst="rect">
-            <a:avLst/>
-          </a:prstGeom>
-        </p:spPr>
-      </p:pic>
-      <p:sp>
-        <p:nvSpPr>
-          <p:cNvPr id="6" name="TextBox 5"/>
-          <p:cNvSpPr txBox="1"/>
-          <p:nvPr/>
-        </p:nvSpPr>
-        <p:spPr>
-          <a:xfrm>
-            <a:off x="548640" y="4526280"/>
-            <a:ext cx="5303520" cy="274320"/>
-          </a:xfrm>
-          <a:prstGeom prst="rect">
-            <a:avLst/>
-          </a:prstGeom>
-          <a:noFill/>
-        </p:spPr>
-        <p:txBody>
-          <a:bodyPr wrap="none">
-            <a:spAutoFit/>
-          </a:bodyPr>
-          <a:lstStyle/>
-          <a:p>
-            <a:pPr algn="ctr">
-              <a:defRPr sz="1000" i="1">
-                <a:solidFill>
-                  <a:srgbClr val="6C757D"/>
-                </a:solidFill>
-              </a:defRPr>
-            </a:pPr>
-            <a:r>
-              <a:t>Thực nghiệm 1: Giảm 94.9% dung lượng (1,400 MB xuống 72 MB)</a:t>
-            </a:r>
-          </a:p>
-        </p:txBody>
-      </p:sp>
-      <p:pic>
-        <p:nvPicPr>
-          <p:cNvPr id="7" name="Picture 6" descr="8_Benchmark_Read_Speed.png"/>
-          <p:cNvPicPr>
-            <a:picLocks noChangeAspect="1"/>
-          </p:cNvPicPr>
-          <p:nvPr/>
-        </p:nvPicPr>
-        <p:blipFill>
-          <a:blip r:embed="rId4"/>
-          <a:stretch>
-            <a:fillRect/>
-          </a:stretch>
-        </p:blipFill>
-        <p:spPr>
-          <a:xfrm>
-            <a:off x="6217920" y="1463040"/>
-            <a:ext cx="5394960" cy="3017520"/>
-          </a:xfrm>
-          <a:prstGeom prst="rect">
-            <a:avLst/>
-          </a:prstGeom>
-        </p:spPr>
-      </p:pic>
-      <p:sp>
-        <p:nvSpPr>
-          <p:cNvPr id="8" name="TextBox 7"/>
-          <p:cNvSpPr txBox="1"/>
-          <p:nvPr/>
-        </p:nvSpPr>
-        <p:spPr>
-          <a:xfrm>
-            <a:off x="6217920" y="4526280"/>
-            <a:ext cx="5394960" cy="274320"/>
-          </a:xfrm>
-          <a:prstGeom prst="rect">
-            <a:avLst/>
-          </a:prstGeom>
-          <a:noFill/>
-        </p:spPr>
-        <p:txBody>
-          <a:bodyPr wrap="none">
-            <a:spAutoFit/>
-          </a:bodyPr>
-          <a:lstStyle/>
-          <a:p>
-            <a:pPr algn="ctr">
-              <a:defRPr sz="1000" i="1">
-                <a:solidFill>
-                  <a:srgbClr val="6C757D"/>
-                </a:solidFill>
-              </a:defRPr>
-            </a:pPr>
-            <a:r>
-              <a:t>Thực nghiệm 2: Tăng tốc đọc gấp ~13.2 lần (18.5s xuống 1.4s)</a:t>
-            </a:r>
-          </a:p>
-        </p:txBody>
-      </p:sp>
-      <p:sp>
-        <p:nvSpPr>
-          <p:cNvPr id="9" name="Rounded Rectangle 8"/>
-          <p:cNvSpPr/>
-          <p:nvPr/>
-        </p:nvSpPr>
-        <p:spPr>
-          <a:xfrm>
-            <a:off x="548640" y="4709160"/>
-            <a:ext cx="11064240" cy="1691640"/>
+            <a:ext cx="5394960" cy="4937760"/>
           </a:xfrm>
           <a:prstGeom prst="roundRect">
             <a:avLst/>
@@ -12618,20 +13304,20 @@
       </p:sp>
       <p:sp>
         <p:nvSpPr>
-          <p:cNvPr id="10" name="Rectangle 9"/>
+          <p:cNvPr id="6" name="Rectangle 5"/>
           <p:cNvSpPr/>
           <p:nvPr/>
         </p:nvSpPr>
         <p:spPr>
           <a:xfrm>
-            <a:off x="548640" y="4709160"/>
-            <a:ext cx="11064240" cy="64008"/>
+            <a:off x="548640" y="1463040"/>
+            <a:ext cx="5394960" cy="64008"/>
           </a:xfrm>
           <a:prstGeom prst="rect">
             <a:avLst/>
           </a:prstGeom>
           <a:solidFill>
-            <a:srgbClr val="2E7D32"/>
+            <a:srgbClr val="1565C0"/>
           </a:solidFill>
           <a:ln>
             <a:noFill/>
@@ -12661,14 +13347,14 @@
       </p:sp>
       <p:sp>
         <p:nvSpPr>
-          <p:cNvPr id="11" name="TextBox 10"/>
+          <p:cNvPr id="7" name="TextBox 6"/>
           <p:cNvSpPr txBox="1"/>
           <p:nvPr/>
         </p:nvSpPr>
         <p:spPr>
           <a:xfrm>
-            <a:off x="685800" y="4818888"/>
-            <a:ext cx="10789919" cy="1527048"/>
+            <a:off x="685800" y="1572768"/>
+            <a:ext cx="5120640" cy="4773168"/>
           </a:xfrm>
           <a:prstGeom prst="rect">
             <a:avLst/>
@@ -12687,12 +13373,12 @@
               </a:spcAft>
               <a:defRPr sz="1300" b="1">
                 <a:solidFill>
-                  <a:srgbClr val="2E7D32"/>
-                </a:solidFill>
-              </a:defRPr>
-            </a:pPr>
-            <a:r>
-              <a:t>KẾT LUẬN TỪ KỊCH BẢN ĐO KIỂM (03_BENCHMARK.PY)</a:t>
+                  <a:srgbClr val="1565C0"/>
+                </a:solidFill>
+              </a:defRPr>
+            </a:pPr>
+            <a:r>
+              <a:t>1. NARROW TRANSFORMATION (XỬ LÝ CỤC BỘ TRÊN RAM)</a:t>
             </a:r>
           </a:p>
           <a:p>
@@ -12707,7 +13393,7 @@
               </a:defRPr>
             </a:pPr>
             <a:r>
-              <a:t>• Tiết kiệm băng thông &amp; đĩa HDFS: File Parquet nén Snappy chỉ chiếm 72 MB so với 1,400 MB của CSV thô (giảm 94.9%).</a:t>
+              <a:t>• Các phép toán dropna() và withColumn() thực thi độc lập trên từng Partition của mỗi Worker.</a:t>
             </a:r>
           </a:p>
           <a:p>
@@ -12722,7 +13408,208 @@
               </a:defRPr>
             </a:pPr>
             <a:r>
-              <a:t>• Tăng tốc In-Memory: Nhờ tích hợp sẵn Metadata Schema và cơ chế Column Pruning, thời gian nạp vào Spark giảm từ 18.5s xuống 1.4s.</a:t>
+              <a:t>• Không phát sinh truyền tải dữ liệu qua mạng giữa các node.</a:t>
+            </a:r>
+          </a:p>
+          <a:p>
+            <a:pPr>
+              <a:spcAft>
+                <a:spcPts val="250"/>
+              </a:spcAft>
+              <a:defRPr sz="1100">
+                <a:solidFill>
+                  <a:srgbClr val="212529"/>
+                </a:solidFill>
+              </a:defRPr>
+            </a:pPr>
+            <a:r>
+              <a:t>• Feature Engineering (Implicit Feedback Scoring): Quy đổi view = 1 điểm, addtocart = 2 điểm, transaction = 3 điểm.</a:t>
+            </a:r>
+          </a:p>
+        </p:txBody>
+      </p:sp>
+      <p:sp>
+        <p:nvSpPr>
+          <p:cNvPr id="8" name="Rounded Rectangle 7"/>
+          <p:cNvSpPr/>
+          <p:nvPr/>
+        </p:nvSpPr>
+        <p:spPr>
+          <a:xfrm>
+            <a:off x="6217920" y="1463040"/>
+            <a:ext cx="5394960" cy="4937760"/>
+          </a:xfrm>
+          <a:prstGeom prst="roundRect">
+            <a:avLst/>
+          </a:prstGeom>
+          <a:solidFill>
+            <a:srgbClr val="F5F8FC"/>
+          </a:solidFill>
+          <a:ln w="12700">
+            <a:solidFill>
+              <a:srgbClr val="BBDEFB"/>
+            </a:solidFill>
+          </a:ln>
+        </p:spPr>
+        <p:style>
+          <a:lnRef idx="1">
+            <a:schemeClr val="accent1"/>
+          </a:lnRef>
+          <a:fillRef idx="3">
+            <a:schemeClr val="accent1"/>
+          </a:fillRef>
+          <a:effectRef idx="2">
+            <a:schemeClr val="accent1"/>
+          </a:effectRef>
+          <a:fontRef idx="minor">
+            <a:schemeClr val="lt1"/>
+          </a:fontRef>
+        </p:style>
+        <p:txBody>
+          <a:bodyPr rtlCol="0" anchor="ctr"/>
+          <a:lstStyle/>
+          <a:p>
+            <a:pPr algn="ctr"/>
+          </a:p>
+        </p:txBody>
+      </p:sp>
+      <p:sp>
+        <p:nvSpPr>
+          <p:cNvPr id="9" name="Rectangle 8"/>
+          <p:cNvSpPr/>
+          <p:nvPr/>
+        </p:nvSpPr>
+        <p:spPr>
+          <a:xfrm>
+            <a:off x="6217920" y="1463040"/>
+            <a:ext cx="5394960" cy="64008"/>
+          </a:xfrm>
+          <a:prstGeom prst="rect">
+            <a:avLst/>
+          </a:prstGeom>
+          <a:solidFill>
+            <a:srgbClr val="E65100"/>
+          </a:solidFill>
+          <a:ln>
+            <a:noFill/>
+          </a:ln>
+        </p:spPr>
+        <p:style>
+          <a:lnRef idx="1">
+            <a:schemeClr val="accent1"/>
+          </a:lnRef>
+          <a:fillRef idx="3">
+            <a:schemeClr val="accent1"/>
+          </a:fillRef>
+          <a:effectRef idx="2">
+            <a:schemeClr val="accent1"/>
+          </a:effectRef>
+          <a:fontRef idx="minor">
+            <a:schemeClr val="lt1"/>
+          </a:fontRef>
+        </p:style>
+        <p:txBody>
+          <a:bodyPr rtlCol="0" anchor="ctr"/>
+          <a:lstStyle/>
+          <a:p>
+            <a:pPr algn="ctr"/>
+          </a:p>
+        </p:txBody>
+      </p:sp>
+      <p:sp>
+        <p:nvSpPr>
+          <p:cNvPr id="10" name="TextBox 9"/>
+          <p:cNvSpPr txBox="1"/>
+          <p:nvPr/>
+        </p:nvSpPr>
+        <p:spPr>
+          <a:xfrm>
+            <a:off x="6355080" y="1572768"/>
+            <a:ext cx="5120640" cy="4773168"/>
+          </a:xfrm>
+          <a:prstGeom prst="rect">
+            <a:avLst/>
+          </a:prstGeom>
+          <a:noFill/>
+        </p:spPr>
+        <p:txBody>
+          <a:bodyPr wrap="square">
+            <a:spAutoFit/>
+          </a:bodyPr>
+          <a:lstStyle/>
+          <a:p>
+            <a:pPr>
+              <a:spcAft>
+                <a:spcPts val="400"/>
+              </a:spcAft>
+              <a:defRPr sz="1300" b="1">
+                <a:solidFill>
+                  <a:srgbClr val="E65100"/>
+                </a:solidFill>
+              </a:defRPr>
+            </a:pPr>
+            <a:r>
+              <a:t>2. WIDE TRANSFORMATION &amp; CƠ CHẾ SHUFFLE</a:t>
+            </a:r>
+          </a:p>
+          <a:p>
+            <a:pPr>
+              <a:spcAft>
+                <a:spcPts val="250"/>
+              </a:spcAft>
+              <a:defRPr sz="1100">
+                <a:solidFill>
+                  <a:srgbClr val="212529"/>
+                </a:solidFill>
+              </a:defRPr>
+            </a:pPr>
+            <a:r>
+              <a:t>• Phép toán dropDuplicates() và groupBy('visitorid', 'itemid').agg(sum('score').alias('rating')).</a:t>
+            </a:r>
+          </a:p>
+          <a:p>
+            <a:pPr>
+              <a:spcAft>
+                <a:spcPts val="250"/>
+              </a:spcAft>
+              <a:defRPr sz="1100">
+                <a:solidFill>
+                  <a:srgbClr val="212529"/>
+                </a:solidFill>
+              </a:defRPr>
+            </a:pPr>
+            <a:r>
+              <a:t>• Bắt buộc Spark thực hiện Shuffle: Gom các bản ghi cùng (visitorid, itemid) nằm rải rác ở các Workers về chung Partition.</a:t>
+            </a:r>
+          </a:p>
+          <a:p>
+            <a:pPr>
+              <a:spcAft>
+                <a:spcPts val="250"/>
+              </a:spcAft>
+              <a:defRPr sz="1100">
+                <a:solidFill>
+                  <a:srgbClr val="212529"/>
+                </a:solidFill>
+              </a:defRPr>
+            </a:pPr>
+            <a:r>
+              <a:t>• Tạo ra Ma trận Tương tác 3 cột chuẩn: visitorid | itemid | rating.</a:t>
+            </a:r>
+          </a:p>
+          <a:p>
+            <a:pPr>
+              <a:spcAft>
+                <a:spcPts val="250"/>
+              </a:spcAft>
+              <a:defRPr sz="1100">
+                <a:solidFill>
+                  <a:srgbClr val="212529"/>
+                </a:solidFill>
+              </a:defRPr>
+            </a:pPr>
+            <a:r>
+              <a:t>• Lazy Evaluation: Catalyst Optimizer tối ưu DAG trước khi ghi file Parquet nén Snappy xuống HDFS.</a:t>
             </a:r>
           </a:p>
         </p:txBody>

--- a/Slide_Bao_Cao_Cuoi_Ky_HUIT.pptx
+++ b/Slide_Bao_Cao_Cuoi_Ky_HUIT.pptx
@@ -3369,7 +3369,7 @@
               </a:defRPr>
             </a:pPr>
             <a:r>
-              <a:t>NGUYỄN VĂN AN</a:t>
+              <a:t>TĂNG GIA HUY</a:t>
             </a:r>
             <a:br/>
             <a:r>

--- a/Slide_Bao_Cao_Cuoi_Ky_HUIT.pptx
+++ b/Slide_Bao_Cao_Cuoi_Ky_HUIT.pptx
@@ -3373,7 +3373,7 @@
             </a:r>
             <a:br/>
             <a:r>
-              <a:t>(2001210001)</a:t>
+              <a:t>(2001230313)</a:t>
             </a:r>
           </a:p>
           <a:p>
@@ -3559,11 +3559,11 @@
               </a:defRPr>
             </a:pPr>
             <a:r>
-              <a:t>TRẦN PHƯƠNG</a:t>
+              <a:t>TRẦN THỊ MINH PHƯƠNG</a:t>
             </a:r>
             <a:br/>
             <a:r>
-              <a:t>(2001210002)</a:t>
+              <a:t>(2001230704)</a:t>
             </a:r>
           </a:p>
           <a:p>
@@ -3753,7 +3753,7 @@
             </a:r>
             <a:br/>
             <a:r>
-              <a:t>(2001210003)</a:t>
+              <a:t>(2001230587)</a:t>
             </a:r>
           </a:p>
           <a:p>
@@ -3943,7 +3943,7 @@
             </a:r>
             <a:br/>
             <a:r>
-              <a:t>(2001210004)</a:t>
+              <a:t>(2001230017)</a:t>
             </a:r>
           </a:p>
           <a:p>
